--- a/Bases de Datos II/Clases/Clase 15 - Presentacion del proyecto y cierre/Presentacion.pptx
+++ b/Bases de Datos II/Clases/Clase 15 - Presentacion del proyecto y cierre/Presentacion.pptx
@@ -19,8 +19,6 @@
     <p:sldId id="267" r:id="rId18"/>
     <p:sldId id="268" r:id="rId19"/>
     <p:sldId id="269" r:id="rId20"/>
-    <p:sldId id="270" r:id="rId21"/>
-    <p:sldId id="271" r:id="rId22"/>
   </p:sldIdLst>
   <p:sldSz cx="12191695" cy="6858000" type="screen4x3"/>
   <p:notesSz cx="6858000" cy="9144000"/>
@@ -5891,1017 +5889,6 @@
         <p:spPr>
           <a:xfrm>
             <a:off x="0" y="0"/>
-            <a:ext cx="12191695" cy="1170432"/>
-          </a:xfrm>
-          <a:prstGeom prst="rect">
-            <a:avLst/>
-          </a:prstGeom>
-          <a:solidFill>
-            <a:srgbClr val="095292"/>
-          </a:solidFill>
-          <a:ln>
-            <a:noFill/>
-          </a:ln>
-        </p:spPr>
-        <p:style>
-          <a:lnRef idx="1">
-            <a:schemeClr val="accent1"/>
-          </a:lnRef>
-          <a:fillRef idx="3">
-            <a:schemeClr val="accent1"/>
-          </a:fillRef>
-          <a:effectRef idx="2">
-            <a:schemeClr val="accent1"/>
-          </a:effectRef>
-          <a:fontRef idx="minor">
-            <a:schemeClr val="lt1"/>
-          </a:fontRef>
-        </p:style>
-        <p:txBody>
-          <a:bodyPr rtlCol="0" anchor="ctr"/>
-          <a:lstStyle/>
-          <a:p>
-            <a:pPr algn="ctr"/>
-          </a:p>
-        </p:txBody>
-      </p:sp>
-      <p:sp>
-        <p:nvSpPr>
-          <p:cNvPr id="3" name="Rectangle 2"/>
-          <p:cNvSpPr/>
-          <p:nvPr/>
-        </p:nvSpPr>
-        <p:spPr>
-          <a:xfrm>
-            <a:off x="0" y="1170432"/>
-            <a:ext cx="12191695" cy="41148"/>
-          </a:xfrm>
-          <a:prstGeom prst="rect">
-            <a:avLst/>
-          </a:prstGeom>
-          <a:solidFill>
-            <a:srgbClr val="FFD000"/>
-          </a:solidFill>
-          <a:ln>
-            <a:noFill/>
-          </a:ln>
-        </p:spPr>
-        <p:style>
-          <a:lnRef idx="1">
-            <a:schemeClr val="accent1"/>
-          </a:lnRef>
-          <a:fillRef idx="3">
-            <a:schemeClr val="accent1"/>
-          </a:fillRef>
-          <a:effectRef idx="2">
-            <a:schemeClr val="accent1"/>
-          </a:effectRef>
-          <a:fontRef idx="minor">
-            <a:schemeClr val="lt1"/>
-          </a:fontRef>
-        </p:style>
-        <p:txBody>
-          <a:bodyPr rtlCol="0" anchor="ctr"/>
-          <a:lstStyle/>
-          <a:p>
-            <a:pPr algn="ctr"/>
-          </a:p>
-        </p:txBody>
-      </p:sp>
-      <p:sp>
-        <p:nvSpPr>
-          <p:cNvPr id="4" name="TextBox 3"/>
-          <p:cNvSpPr txBox="1"/>
-          <p:nvPr/>
-        </p:nvSpPr>
-        <p:spPr>
-          <a:xfrm>
-            <a:off x="457200" y="164592"/>
-            <a:ext cx="11277295" cy="384048"/>
-          </a:xfrm>
-          <a:prstGeom prst="rect">
-            <a:avLst/>
-          </a:prstGeom>
-          <a:noFill/>
-        </p:spPr>
-        <p:txBody>
-          <a:bodyPr wrap="square">
-            <a:spAutoFit/>
-          </a:bodyPr>
-          <a:lstStyle/>
-          <a:p>
-            <a:r>
-              <a:rPr sz="2600" b="1" i="0">
-                <a:solidFill>
-                  <a:srgbClr val="FFFFFF"/>
-                </a:solidFill>
-                <a:latin typeface="Calibri"/>
-              </a:rPr>
-              <a:t>Quiz rapido (cierre)</a:t>
-            </a:r>
-          </a:p>
-        </p:txBody>
-      </p:sp>
-      <p:sp>
-        <p:nvSpPr>
-          <p:cNvPr id="5" name="TextBox 4"/>
-          <p:cNvSpPr txBox="1"/>
-          <p:nvPr/>
-        </p:nvSpPr>
-        <p:spPr>
-          <a:xfrm>
-            <a:off x="457200" y="566928"/>
-            <a:ext cx="11277295" cy="411480"/>
-          </a:xfrm>
-          <a:prstGeom prst="rect">
-            <a:avLst/>
-          </a:prstGeom>
-          <a:noFill/>
-        </p:spPr>
-        <p:txBody>
-          <a:bodyPr wrap="square">
-            <a:spAutoFit/>
-          </a:bodyPr>
-          <a:lstStyle/>
-          <a:p>
-            <a:r>
-              <a:rPr sz="1400" b="0" i="0">
-                <a:solidFill>
-                  <a:srgbClr val="B8D8EE"/>
-                </a:solidFill>
-                <a:latin typeface="Calibri"/>
-              </a:rPr>
-              <a:t>Individual · 8–10 min</a:t>
-            </a:r>
-          </a:p>
-        </p:txBody>
-      </p:sp>
-      <p:sp>
-        <p:nvSpPr>
-          <p:cNvPr id="6" name="TextBox 5"/>
-          <p:cNvSpPr txBox="1"/>
-          <p:nvPr/>
-        </p:nvSpPr>
-        <p:spPr>
-          <a:xfrm>
-            <a:off x="457200" y="1380744"/>
-            <a:ext cx="11277295" cy="5020056"/>
-          </a:xfrm>
-          <a:prstGeom prst="rect">
-            <a:avLst/>
-          </a:prstGeom>
-          <a:noFill/>
-        </p:spPr>
-        <p:txBody>
-          <a:bodyPr wrap="square">
-            <a:spAutoFit/>
-          </a:bodyPr>
-          <a:lstStyle/>
-          <a:p>
-            <a:pPr>
-              <a:spcAft>
-                <a:spcPts val="800"/>
-              </a:spcAft>
-            </a:pPr>
-            <a:r>
-              <a:rPr sz="1200" b="1" i="0">
-                <a:solidFill>
-                  <a:srgbClr val="333333"/>
-                </a:solidFill>
-                <a:latin typeface="Calibri"/>
-              </a:rPr>
-              <a:t>1.</a:t>
-            </a:r>
-            <a:r>
-              <a:rPr sz="1200" b="0" i="0">
-                <a:solidFill>
-                  <a:srgbClr val="333333"/>
-                </a:solidFill>
-                <a:latin typeface="Calibri"/>
-              </a:rPr>
-              <a:t> En la sustentación VetCare, lo mínimo a demostrar es:</a:t>
-            </a:r>
-          </a:p>
-          <a:p>
-            <a:pPr>
-              <a:spcAft>
-                <a:spcPts val="800"/>
-              </a:spcAft>
-            </a:pPr>
-            <a:r>
-              <a:rPr sz="1200" b="0" i="0">
-                <a:solidFill>
-                  <a:srgbClr val="333333"/>
-                </a:solidFill>
-                <a:latin typeface="Calibri"/>
-              </a:rPr>
-              <a:t>–   ('A) Solo hablar sin demo', 1)</a:t>
-            </a:r>
-          </a:p>
-          <a:p>
-            <a:pPr>
-              <a:spcAft>
-                <a:spcPts val="800"/>
-              </a:spcAft>
-            </a:pPr>
-            <a:r>
-              <a:rPr sz="1200" b="0" i="0">
-                <a:solidFill>
-                  <a:srgbClr val="333333"/>
-                </a:solidFill>
-                <a:latin typeface="Calibri"/>
-              </a:rPr>
-              <a:t>–   ('B) Modelo + operaciones clave + evidencias de rúbrica', 1)</a:t>
-            </a:r>
-          </a:p>
-          <a:p>
-            <a:pPr>
-              <a:spcAft>
-                <a:spcPts val="800"/>
-              </a:spcAft>
-            </a:pPr>
-            <a:r>
-              <a:rPr sz="1200" b="0" i="0">
-                <a:solidFill>
-                  <a:srgbClr val="333333"/>
-                </a:solidFill>
-                <a:latin typeface="Calibri"/>
-              </a:rPr>
-              <a:t>–   ('C) Solo el Campus Virtual', 1)</a:t>
-            </a:r>
-          </a:p>
-          <a:p>
-            <a:pPr>
-              <a:spcAft>
-                <a:spcPts val="800"/>
-              </a:spcAft>
-            </a:pPr>
-            <a:r>
-              <a:rPr sz="1200" b="0" i="0">
-                <a:solidFill>
-                  <a:srgbClr val="333333"/>
-                </a:solidFill>
-                <a:latin typeface="Calibri"/>
-              </a:rPr>
-              <a:t>–   ('D) AWS de pago', 1)</a:t>
-            </a:r>
-          </a:p>
-          <a:p>
-            <a:pPr>
-              <a:spcAft>
-                <a:spcPts val="800"/>
-              </a:spcAft>
-            </a:pPr>
-            <a:r>
-              <a:rPr sz="1200" b="0" i="0">
-                <a:solidFill>
-                  <a:srgbClr val="333333"/>
-                </a:solidFill>
-                <a:latin typeface="Calibri"/>
-              </a:rPr>
-              <a:t>–   </a:t>
-            </a:r>
-            <a:r>
-              <a:rPr sz="1200" b="1" i="0">
-                <a:solidFill>
-                  <a:srgbClr val="333333"/>
-                </a:solidFill>
-                <a:latin typeface="Calibri"/>
-              </a:rPr>
-              <a:t>2.</a:t>
-            </a:r>
-            <a:r>
-              <a:rPr sz="1200" b="0" i="0">
-                <a:solidFill>
-                  <a:srgbClr val="333333"/>
-                </a:solidFill>
-                <a:latin typeface="Calibri"/>
-              </a:rPr>
-              <a:t> El PI (20% Corte 3):</a:t>
-            </a:r>
-          </a:p>
-          <a:p>
-            <a:pPr>
-              <a:spcAft>
-                <a:spcPts val="800"/>
-              </a:spcAft>
-            </a:pPr>
-            <a:r>
-              <a:rPr sz="1200" b="0" i="0">
-                <a:solidFill>
-                  <a:srgbClr val="333333"/>
-                </a:solidFill>
-                <a:latin typeface="Calibri"/>
-              </a:rPr>
-              <a:t>–   ('A) Reemplaza el Parcial 3', 1)</a:t>
-            </a:r>
-          </a:p>
-          <a:p>
-            <a:pPr>
-              <a:spcAft>
-                <a:spcPts val="800"/>
-              </a:spcAft>
-            </a:pPr>
-            <a:r>
-              <a:rPr sz="1200" b="0" i="0">
-                <a:solidFill>
-                  <a:srgbClr val="333333"/>
-                </a:solidFill>
-                <a:latin typeface="Calibri"/>
-              </a:rPr>
-              <a:t>–   ('B) No sustituye el Parcial 3', 1)</a:t>
-            </a:r>
-          </a:p>
-          <a:p>
-            <a:pPr>
-              <a:spcAft>
-                <a:spcPts val="800"/>
-              </a:spcAft>
-            </a:pPr>
-            <a:r>
-              <a:rPr sz="1200" b="0" i="0">
-                <a:solidFill>
-                  <a:srgbClr val="333333"/>
-                </a:solidFill>
-                <a:latin typeface="Calibri"/>
-              </a:rPr>
-              <a:t>–   ('C) Elimina asistencia', 1)</a:t>
-            </a:r>
-          </a:p>
-          <a:p>
-            <a:pPr>
-              <a:spcAft>
-                <a:spcPts val="800"/>
-              </a:spcAft>
-            </a:pPr>
-            <a:r>
-              <a:rPr sz="1200" b="0" i="0">
-                <a:solidFill>
-                  <a:srgbClr val="333333"/>
-                </a:solidFill>
-                <a:latin typeface="Calibri"/>
-              </a:rPr>
-              <a:t>–   ('D) Es sin rúbrica', 1)</a:t>
-            </a:r>
-          </a:p>
-          <a:p>
-            <a:pPr>
-              <a:spcAft>
-                <a:spcPts val="800"/>
-              </a:spcAft>
-            </a:pPr>
-            <a:r>
-              <a:rPr sz="1200" b="0" i="0">
-                <a:solidFill>
-                  <a:srgbClr val="333333"/>
-                </a:solidFill>
-                <a:latin typeface="Calibri"/>
-              </a:rPr>
-              <a:t>–   </a:t>
-            </a:r>
-            <a:r>
-              <a:rPr sz="1200" b="1" i="0">
-                <a:solidFill>
-                  <a:srgbClr val="333333"/>
-                </a:solidFill>
-                <a:latin typeface="Calibri"/>
-              </a:rPr>
-              <a:t>3.</a:t>
-            </a:r>
-            <a:r>
-              <a:rPr sz="1200" b="0" i="0">
-                <a:solidFill>
-                  <a:srgbClr val="333333"/>
-                </a:solidFill>
-                <a:latin typeface="Calibri"/>
-              </a:rPr>
-              <a:t> Mostrar secretos/credenciales en pantalla durante la demo es aceptable.</a:t>
-            </a:r>
-          </a:p>
-          <a:p>
-            <a:pPr>
-              <a:spcAft>
-                <a:spcPts val="800"/>
-              </a:spcAft>
-            </a:pPr>
-            <a:r>
-              <a:rPr sz="1200" b="0" i="0">
-                <a:solidFill>
-                  <a:srgbClr val="333333"/>
-                </a:solidFill>
-                <a:latin typeface="Calibri"/>
-              </a:rPr>
-              <a:t>–   ('( ) Verdadero    ( ) Falso', 1)</a:t>
-            </a:r>
-          </a:p>
-          <a:p>
-            <a:pPr>
-              <a:spcAft>
-                <a:spcPts val="800"/>
-              </a:spcAft>
-            </a:pPr>
-            <a:r>
-              <a:rPr sz="1200" b="0" i="0">
-                <a:solidFill>
-                  <a:srgbClr val="333333"/>
-                </a:solidFill>
-                <a:latin typeface="Calibri"/>
-              </a:rPr>
-              <a:t>–   </a:t>
-            </a:r>
-            <a:r>
-              <a:rPr sz="1200" b="1" i="0">
-                <a:solidFill>
-                  <a:srgbClr val="333333"/>
-                </a:solidFill>
-                <a:latin typeface="Calibri"/>
-              </a:rPr>
-              <a:t>4.</a:t>
-            </a:r>
-            <a:r>
-              <a:rPr sz="1200" b="0" i="0">
-                <a:solidFill>
-                  <a:srgbClr val="333333"/>
-                </a:solidFill>
-                <a:latin typeface="Calibri"/>
-              </a:rPr>
-              <a:t> La demo debe usar el dominio VetCare del equipo (no otro caso improvisado).</a:t>
-            </a:r>
-          </a:p>
-          <a:p>
-            <a:pPr>
-              <a:spcAft>
-                <a:spcPts val="800"/>
-              </a:spcAft>
-            </a:pPr>
-            <a:r>
-              <a:rPr sz="1200" b="0" i="0">
-                <a:solidFill>
-                  <a:srgbClr val="333333"/>
-                </a:solidFill>
-                <a:latin typeface="Calibri"/>
-              </a:rPr>
-              <a:t>–   ('( ) Verdadero    ( ) Falso', 1)</a:t>
-            </a:r>
-          </a:p>
-        </p:txBody>
-      </p:sp>
-      <p:sp>
-        <p:nvSpPr>
-          <p:cNvPr id="7" name="TextBox 6"/>
-          <p:cNvSpPr txBox="1"/>
-          <p:nvPr/>
-        </p:nvSpPr>
-        <p:spPr>
-          <a:xfrm>
-            <a:off x="11185855" y="6473952"/>
-            <a:ext cx="640080" cy="274320"/>
-          </a:xfrm>
-          <a:prstGeom prst="rect">
-            <a:avLst/>
-          </a:prstGeom>
-          <a:noFill/>
-        </p:spPr>
-        <p:txBody>
-          <a:bodyPr wrap="square">
-            <a:spAutoFit/>
-          </a:bodyPr>
-          <a:lstStyle/>
-          <a:p>
-            <a:pPr algn="r"/>
-            <a:r>
-              <a:rPr sz="1100" b="0" i="0">
-                <a:solidFill>
-                  <a:srgbClr val="666666"/>
-                </a:solidFill>
-                <a:latin typeface="Calibri"/>
-              </a:rPr>
-              <a:t>14</a:t>
-            </a:r>
-          </a:p>
-        </p:txBody>
-      </p:sp>
-    </p:spTree>
-  </p:cSld>
-  <p:clrMapOvr>
-    <a:masterClrMapping/>
-  </p:clrMapOvr>
-</p:sld>
-</file>
-
-<file path=ppt/slides/slide15.xml><?xml version="1.0" encoding="utf-8"?>
-<p:sld xmlns:a="http://schemas.openxmlformats.org/drawingml/2006/main" xmlns:p="http://schemas.openxmlformats.org/presentationml/2006/main" xmlns:r="http://schemas.openxmlformats.org/officeDocument/2006/relationships">
-  <p:cSld>
-    <p:bg>
-      <p:bgPr>
-        <a:solidFill>
-          <a:srgbClr val="FFFFFF"/>
-        </a:solidFill>
-        <a:effectLst/>
-      </p:bgPr>
-    </p:bg>
-    <p:spTree>
-      <p:nvGrpSpPr>
-        <p:cNvPr id="1" name=""/>
-        <p:cNvGrpSpPr/>
-        <p:nvPr/>
-      </p:nvGrpSpPr>
-      <p:grpSpPr/>
-      <p:sp>
-        <p:nvSpPr>
-          <p:cNvPr id="2" name="Rectangle 1"/>
-          <p:cNvSpPr/>
-          <p:nvPr/>
-        </p:nvSpPr>
-        <p:spPr>
-          <a:xfrm>
-            <a:off x="0" y="0"/>
-            <a:ext cx="12191695" cy="1170432"/>
-          </a:xfrm>
-          <a:prstGeom prst="rect">
-            <a:avLst/>
-          </a:prstGeom>
-          <a:solidFill>
-            <a:srgbClr val="095292"/>
-          </a:solidFill>
-          <a:ln>
-            <a:noFill/>
-          </a:ln>
-        </p:spPr>
-        <p:style>
-          <a:lnRef idx="1">
-            <a:schemeClr val="accent1"/>
-          </a:lnRef>
-          <a:fillRef idx="3">
-            <a:schemeClr val="accent1"/>
-          </a:fillRef>
-          <a:effectRef idx="2">
-            <a:schemeClr val="accent1"/>
-          </a:effectRef>
-          <a:fontRef idx="minor">
-            <a:schemeClr val="lt1"/>
-          </a:fontRef>
-        </p:style>
-        <p:txBody>
-          <a:bodyPr rtlCol="0" anchor="ctr"/>
-          <a:lstStyle/>
-          <a:p>
-            <a:pPr algn="ctr"/>
-          </a:p>
-        </p:txBody>
-      </p:sp>
-      <p:sp>
-        <p:nvSpPr>
-          <p:cNvPr id="3" name="Rectangle 2"/>
-          <p:cNvSpPr/>
-          <p:nvPr/>
-        </p:nvSpPr>
-        <p:spPr>
-          <a:xfrm>
-            <a:off x="0" y="1170432"/>
-            <a:ext cx="12191695" cy="41148"/>
-          </a:xfrm>
-          <a:prstGeom prst="rect">
-            <a:avLst/>
-          </a:prstGeom>
-          <a:solidFill>
-            <a:srgbClr val="FFD000"/>
-          </a:solidFill>
-          <a:ln>
-            <a:noFill/>
-          </a:ln>
-        </p:spPr>
-        <p:style>
-          <a:lnRef idx="1">
-            <a:schemeClr val="accent1"/>
-          </a:lnRef>
-          <a:fillRef idx="3">
-            <a:schemeClr val="accent1"/>
-          </a:fillRef>
-          <a:effectRef idx="2">
-            <a:schemeClr val="accent1"/>
-          </a:effectRef>
-          <a:fontRef idx="minor">
-            <a:schemeClr val="lt1"/>
-          </a:fontRef>
-        </p:style>
-        <p:txBody>
-          <a:bodyPr rtlCol="0" anchor="ctr"/>
-          <a:lstStyle/>
-          <a:p>
-            <a:pPr algn="ctr"/>
-          </a:p>
-        </p:txBody>
-      </p:sp>
-      <p:sp>
-        <p:nvSpPr>
-          <p:cNvPr id="4" name="TextBox 3"/>
-          <p:cNvSpPr txBox="1"/>
-          <p:nvPr/>
-        </p:nvSpPr>
-        <p:spPr>
-          <a:xfrm>
-            <a:off x="457200" y="164592"/>
-            <a:ext cx="11277295" cy="384048"/>
-          </a:xfrm>
-          <a:prstGeom prst="rect">
-            <a:avLst/>
-          </a:prstGeom>
-          <a:noFill/>
-        </p:spPr>
-        <p:txBody>
-          <a:bodyPr wrap="square">
-            <a:spAutoFit/>
-          </a:bodyPr>
-          <a:lstStyle/>
-          <a:p>
-            <a:r>
-              <a:rPr sz="2600" b="1" i="0">
-                <a:solidFill>
-                  <a:srgbClr val="FFFFFF"/>
-                </a:solidFill>
-                <a:latin typeface="Calibri"/>
-              </a:rPr>
-              <a:t>Quiz rapido (cierre) · cont. 2</a:t>
-            </a:r>
-          </a:p>
-        </p:txBody>
-      </p:sp>
-      <p:sp>
-        <p:nvSpPr>
-          <p:cNvPr id="5" name="TextBox 4"/>
-          <p:cNvSpPr txBox="1"/>
-          <p:nvPr/>
-        </p:nvSpPr>
-        <p:spPr>
-          <a:xfrm>
-            <a:off x="457200" y="566928"/>
-            <a:ext cx="11277295" cy="411480"/>
-          </a:xfrm>
-          <a:prstGeom prst="rect">
-            <a:avLst/>
-          </a:prstGeom>
-          <a:noFill/>
-        </p:spPr>
-        <p:txBody>
-          <a:bodyPr wrap="square">
-            <a:spAutoFit/>
-          </a:bodyPr>
-          <a:lstStyle/>
-          <a:p>
-            <a:r>
-              <a:rPr sz="1400" b="0" i="0">
-                <a:solidFill>
-                  <a:srgbClr val="B8D8EE"/>
-                </a:solidFill>
-                <a:latin typeface="Calibri"/>
-              </a:rPr>
-              <a:t>Individual · 8–10 min</a:t>
-            </a:r>
-          </a:p>
-        </p:txBody>
-      </p:sp>
-      <p:sp>
-        <p:nvSpPr>
-          <p:cNvPr id="6" name="TextBox 5"/>
-          <p:cNvSpPr txBox="1"/>
-          <p:nvPr/>
-        </p:nvSpPr>
-        <p:spPr>
-          <a:xfrm>
-            <a:off x="457200" y="1380744"/>
-            <a:ext cx="11277295" cy="5020056"/>
-          </a:xfrm>
-          <a:prstGeom prst="rect">
-            <a:avLst/>
-          </a:prstGeom>
-          <a:noFill/>
-        </p:spPr>
-        <p:txBody>
-          <a:bodyPr wrap="square">
-            <a:spAutoFit/>
-          </a:bodyPr>
-          <a:lstStyle/>
-          <a:p>
-            <a:pPr>
-              <a:spcAft>
-                <a:spcPts val="800"/>
-              </a:spcAft>
-            </a:pPr>
-            <a:r>
-              <a:rPr sz="1200" b="0" i="0">
-                <a:solidFill>
-                  <a:srgbClr val="333333"/>
-                </a:solidFill>
-                <a:latin typeface="Calibri"/>
-              </a:rPr>
-              <a:t>–   </a:t>
-            </a:r>
-            <a:r>
-              <a:rPr sz="1200" b="1" i="0">
-                <a:solidFill>
-                  <a:srgbClr val="333333"/>
-                </a:solidFill>
-                <a:latin typeface="Calibri"/>
-              </a:rPr>
-              <a:t>5.</a:t>
-            </a:r>
-            <a:r>
-              <a:rPr sz="1200" b="0" i="0">
-                <a:solidFill>
-                  <a:srgbClr val="333333"/>
-                </a:solidFill>
-                <a:latin typeface="Calibri"/>
-              </a:rPr>
-              <a:t> Orden razonable de pitch:</a:t>
-            </a:r>
-          </a:p>
-          <a:p>
-            <a:pPr>
-              <a:spcAft>
-                <a:spcPts val="800"/>
-              </a:spcAft>
-            </a:pPr>
-            <a:r>
-              <a:rPr sz="1200" b="0" i="0">
-                <a:solidFill>
-                  <a:srgbClr val="333333"/>
-                </a:solidFill>
-                <a:latin typeface="Calibri"/>
-              </a:rPr>
-              <a:t>–   ('A) Problema → modelo → ops/demo → decisiones → cierre', 1)</a:t>
-            </a:r>
-          </a:p>
-          <a:p>
-            <a:pPr>
-              <a:spcAft>
-                <a:spcPts val="800"/>
-              </a:spcAft>
-            </a:pPr>
-            <a:r>
-              <a:rPr sz="1200" b="0" i="0">
-                <a:solidFill>
-                  <a:srgbClr val="333333"/>
-                </a:solidFill>
-                <a:latin typeface="Calibri"/>
-              </a:rPr>
-              <a:t>–   ('B) Solo memes', 1)</a:t>
-            </a:r>
-          </a:p>
-          <a:p>
-            <a:pPr>
-              <a:spcAft>
-                <a:spcPts val="800"/>
-              </a:spcAft>
-            </a:pPr>
-            <a:r>
-              <a:rPr sz="1200" b="0" i="0">
-                <a:solidFill>
-                  <a:srgbClr val="333333"/>
-                </a:solidFill>
-                <a:latin typeface="Calibri"/>
-              </a:rPr>
-              <a:t>–   ('C) Leer 40 diapositivas de teoría', 1)</a:t>
-            </a:r>
-          </a:p>
-          <a:p>
-            <a:pPr>
-              <a:spcAft>
-                <a:spcPts val="800"/>
-              </a:spcAft>
-            </a:pPr>
-            <a:r>
-              <a:rPr sz="1200" b="0" i="0">
-                <a:solidFill>
-                  <a:srgbClr val="333333"/>
-                </a:solidFill>
-                <a:latin typeface="Calibri"/>
-              </a:rPr>
-              <a:t>–   ('D) Empezar por la factura AWS', 1)</a:t>
-            </a:r>
-          </a:p>
-          <a:p>
-            <a:pPr>
-              <a:spcAft>
-                <a:spcPts val="800"/>
-              </a:spcAft>
-            </a:pPr>
-            <a:r>
-              <a:rPr sz="1200" b="0" i="0">
-                <a:solidFill>
-                  <a:srgbClr val="333333"/>
-                </a:solidFill>
-                <a:latin typeface="Calibri"/>
-              </a:rPr>
-              <a:t>–   </a:t>
-            </a:r>
-            <a:r>
-              <a:rPr sz="1200" b="1" i="0">
-                <a:solidFill>
-                  <a:srgbClr val="333333"/>
-                </a:solidFill>
-                <a:latin typeface="Calibri"/>
-              </a:rPr>
-              <a:t>6.</a:t>
-            </a:r>
-            <a:r>
-              <a:rPr sz="1200" b="0" i="0">
-                <a:solidFill>
-                  <a:srgbClr val="333333"/>
-                </a:solidFill>
-                <a:latin typeface="Calibri"/>
-              </a:rPr>
-              <a:t> Un fallo controlado explicado (rollback/validación) puede reforzar el diseño.</a:t>
-            </a:r>
-          </a:p>
-          <a:p>
-            <a:pPr>
-              <a:spcAft>
-                <a:spcPts val="800"/>
-              </a:spcAft>
-            </a:pPr>
-            <a:r>
-              <a:rPr sz="1200" b="0" i="0">
-                <a:solidFill>
-                  <a:srgbClr val="333333"/>
-                </a:solidFill>
-                <a:latin typeface="Calibri"/>
-              </a:rPr>
-              <a:t>–   ('( ) Verdadero    ( ) Falso', 1)</a:t>
-            </a:r>
-          </a:p>
-          <a:p>
-            <a:pPr>
-              <a:spcAft>
-                <a:spcPts val="800"/>
-              </a:spcAft>
-            </a:pPr>
-            <a:r>
-              <a:rPr sz="1200" b="0" i="0">
-                <a:solidFill>
-                  <a:srgbClr val="333333"/>
-                </a:solidFill>
-                <a:latin typeface="Calibri"/>
-              </a:rPr>
-              <a:t>–   </a:t>
-            </a:r>
-            <a:r>
-              <a:rPr sz="1200" b="1" i="0">
-                <a:solidFill>
-                  <a:srgbClr val="333333"/>
-                </a:solidFill>
-                <a:latin typeface="Calibri"/>
-              </a:rPr>
-              <a:t>7.</a:t>
-            </a:r>
-            <a:r>
-              <a:rPr sz="1200" b="0" i="0">
-                <a:solidFill>
-                  <a:srgbClr val="333333"/>
-                </a:solidFill>
-                <a:latin typeface="Calibri"/>
-              </a:rPr>
-              <a:t> Liste las evidencias que proyectarán (archivos/URLs) en la sustentación.</a:t>
-            </a:r>
-          </a:p>
-          <a:p>
-            <a:pPr>
-              <a:spcAft>
-                <a:spcPts val="800"/>
-              </a:spcAft>
-            </a:pPr>
-            <a:r>
-              <a:rPr sz="1200" b="0" i="0">
-                <a:solidFill>
-                  <a:srgbClr val="333333"/>
-                </a:solidFill>
-                <a:latin typeface="Calibri"/>
-              </a:rPr>
-              <a:t>–   ('Respuesta corta: ____________________________', 1)</a:t>
-            </a:r>
-          </a:p>
-          <a:p>
-            <a:pPr>
-              <a:spcAft>
-                <a:spcPts val="800"/>
-              </a:spcAft>
-            </a:pPr>
-            <a:r>
-              <a:rPr sz="1200" b="0" i="0">
-                <a:solidFill>
-                  <a:srgbClr val="333333"/>
-                </a:solidFill>
-                <a:latin typeface="Calibri"/>
-              </a:rPr>
-              <a:t>–   </a:t>
-            </a:r>
-            <a:r>
-              <a:rPr sz="1200" b="1" i="0">
-                <a:solidFill>
-                  <a:srgbClr val="333333"/>
-                </a:solidFill>
-                <a:latin typeface="Calibri"/>
-              </a:rPr>
-              <a:t>8.</a:t>
-            </a:r>
-            <a:r>
-              <a:rPr sz="1200" b="0" i="0">
-                <a:solidFill>
-                  <a:srgbClr val="333333"/>
-                </a:solidFill>
-                <a:latin typeface="Calibri"/>
-              </a:rPr>
-              <a:t> Trade-off principal que defenderán (1–2 frases).</a:t>
-            </a:r>
-          </a:p>
-          <a:p>
-            <a:pPr>
-              <a:spcAft>
-                <a:spcPts val="800"/>
-              </a:spcAft>
-            </a:pPr>
-            <a:r>
-              <a:rPr sz="1200" b="0" i="0">
-                <a:solidFill>
-                  <a:srgbClr val="333333"/>
-                </a:solidFill>
-                <a:latin typeface="Calibri"/>
-              </a:rPr>
-              <a:t>–   ('Respuesta corta: ____________________________', 1)</a:t>
-            </a:r>
-          </a:p>
-        </p:txBody>
-      </p:sp>
-      <p:sp>
-        <p:nvSpPr>
-          <p:cNvPr id="7" name="TextBox 6"/>
-          <p:cNvSpPr txBox="1"/>
-          <p:nvPr/>
-        </p:nvSpPr>
-        <p:spPr>
-          <a:xfrm>
-            <a:off x="11185855" y="6473952"/>
-            <a:ext cx="640080" cy="274320"/>
-          </a:xfrm>
-          <a:prstGeom prst="rect">
-            <a:avLst/>
-          </a:prstGeom>
-          <a:noFill/>
-        </p:spPr>
-        <p:txBody>
-          <a:bodyPr wrap="square">
-            <a:spAutoFit/>
-          </a:bodyPr>
-          <a:lstStyle/>
-          <a:p>
-            <a:pPr algn="r"/>
-            <a:r>
-              <a:rPr sz="1100" b="0" i="0">
-                <a:solidFill>
-                  <a:srgbClr val="666666"/>
-                </a:solidFill>
-                <a:latin typeface="Calibri"/>
-              </a:rPr>
-              <a:t>15</a:t>
-            </a:r>
-          </a:p>
-        </p:txBody>
-      </p:sp>
-    </p:spTree>
-  </p:cSld>
-  <p:clrMapOvr>
-    <a:masterClrMapping/>
-  </p:clrMapOvr>
-</p:sld>
-</file>
-
-<file path=ppt/slides/slide16.xml><?xml version="1.0" encoding="utf-8"?>
-<p:sld xmlns:a="http://schemas.openxmlformats.org/drawingml/2006/main" xmlns:p="http://schemas.openxmlformats.org/presentationml/2006/main" xmlns:r="http://schemas.openxmlformats.org/officeDocument/2006/relationships">
-  <p:cSld>
-    <p:bg>
-      <p:bgPr>
-        <a:solidFill>
-          <a:srgbClr val="FFFFFF"/>
-        </a:solidFill>
-        <a:effectLst/>
-      </p:bgPr>
-    </p:bg>
-    <p:spTree>
-      <p:nvGrpSpPr>
-        <p:cNvPr id="1" name=""/>
-        <p:cNvGrpSpPr/>
-        <p:nvPr/>
-      </p:nvGrpSpPr>
-      <p:grpSpPr/>
-      <p:sp>
-        <p:nvSpPr>
-          <p:cNvPr id="2" name="Rectangle 1"/>
-          <p:cNvSpPr/>
-          <p:nvPr/>
-        </p:nvSpPr>
-        <p:spPr>
-          <a:xfrm>
-            <a:off x="0" y="0"/>
             <a:ext cx="12191695" cy="164592"/>
           </a:xfrm>
           <a:prstGeom prst="rect">
@@ -8230,7 +7217,7 @@
                 </a:solidFill>
                 <a:latin typeface="Calibri"/>
               </a:rPr>
-              <a:t>Criterios · quiz/cierre · duda PI</a:t>
+              <a:t>Criterios de exito · cierre · dudas del PI</a:t>
             </a:r>
           </a:p>
         </p:txBody>

--- a/Bases de Datos II/Clases/Clase 15 - Presentacion del proyecto y cierre/Presentacion.pptx
+++ b/Bases de Datos II/Clases/Clase 15 - Presentacion del proyecto y cierre/Presentacion.pptx
@@ -9179,7 +9179,7 @@
                 </a:solidFill>
                 <a:latin typeface="Calibri"/>
               </a:rPr>
-              <a:t> ZIP/PDF Campus.</a:t>
+              <a:t> ZIP/PDF en ExamLab.</a:t>
             </a:r>
           </a:p>
           <a:p>

--- a/Bases de Datos II/Clases/Clase 15 - Presentacion del proyecto y cierre/Presentacion.pptx
+++ b/Bases de Datos II/Clases/Clase 15 - Presentacion del proyecto y cierre/Presentacion.pptx
@@ -5219,7 +5219,7 @@
                 </a:solidFill>
                 <a:latin typeface="Calibri"/>
               </a:rPr>
-              <a:t> (Talleres) — domingo 23:59 cuando aplique taller.</a:t>
+              <a:t> (https://examlab.lovable.app/) — domingo 23:59 cuando aplique taller.</a:t>
             </a:r>
           </a:p>
         </p:txBody>
@@ -5814,7 +5814,7 @@
                 </a:solidFill>
                 <a:latin typeface="Calibri"/>
               </a:rPr>
-              <a:t>Taller de la semana en ExamLab: domingo 23:59 (regla del Acuerdo) cuando aplique.</a:t>
+              <a:t>Taller de la semana en ExamLab (https://examlab.lovable.app/): domingo 23:59 (regla del Acuerdo) cuando aplique.</a:t>
             </a:r>
           </a:p>
         </p:txBody>

--- a/Bases de Datos II/Clases/Clase 15 - Presentacion del proyecto y cierre/Presentacion.pptx
+++ b/Bases de Datos II/Clases/Clase 15 - Presentacion del proyecto y cierre/Presentacion.pptx
@@ -4750,7 +4750,7 @@
                 </a:solidFill>
                 <a:latin typeface="Calibri"/>
               </a:rPr>
-              <a:t>□ Todos hablan?</a:t>
+              <a:t>□ Cubre todos los bloques (y todos hablan, si hay equipo)?</a:t>
             </a:r>
           </a:p>
         </p:txBody>
@@ -5169,7 +5169,7 @@
                 </a:solidFill>
                 <a:latin typeface="Calibri"/>
               </a:rPr>
-              <a:t>–   Evidencia en playground (enlace) o archivo SQL/PNG del equipo.</a:t>
+              <a:t>–   Evidencia en playground (enlace) o archivo SQL/PNG propio.</a:t>
             </a:r>
           </a:p>
           <a:p>
@@ -6309,7 +6309,7 @@
                 </a:solidFill>
                 <a:latin typeface="Calibri"/>
               </a:rPr>
-              <a:t>ExamLab (Proyectos) + slides del equipo</a:t>
+              <a:t>ExamLab (Proyectos) + slides propias</a:t>
             </a:r>
             <a:r>
               <a:rPr sz="1600" b="0" i="0">
@@ -6418,7 +6418,7 @@
                 </a:solidFill>
                 <a:latin typeface="Calibri"/>
               </a:rPr>
-              <a:t>–   Al salir: avance concreto en el paquete VetCare del equipo.</a:t>
+              <a:t>–   Al salir: avance concreto en su paquete VetCare.</a:t>
             </a:r>
           </a:p>
         </p:txBody>
@@ -7522,7 +7522,7 @@
                 </a:solidFill>
                 <a:latin typeface="Calibri"/>
               </a:rPr>
-              <a:t>–   Autoevaluacion del proceso del equipo.</a:t>
+              <a:t>–   Autoevaluacion del propio proceso de trabajo.</a:t>
             </a:r>
           </a:p>
         </p:txBody>
@@ -7760,7 +7760,7 @@
                 </a:solidFill>
                 <a:latin typeface="Calibri"/>
               </a:rPr>
-              <a:t> ExamLab (Proyectos) + slides del equipo</a:t>
+              <a:t> ExamLab (Proyectos) + slides propias</a:t>
             </a:r>
           </a:p>
           <a:p>
@@ -7826,7 +7826,7 @@
                 </a:solidFill>
                 <a:latin typeface="Calibri"/>
               </a:rPr>
-              <a:t>–   Al final de la demo: dejar enlace/script compartible al equipo.</a:t>
+              <a:t>–   Al final de la demo: dejar enlace/script compartible al grupo.</a:t>
             </a:r>
           </a:p>
         </p:txBody>

--- a/Bases de Datos II/Clases/Clase 15 - Presentacion del proyecto y cierre/Presentacion.pptx
+++ b/Bases de Datos II/Clases/Clase 15 - Presentacion del proyecto y cierre/Presentacion.pptx
@@ -3438,7 +3438,7 @@
                 </a:solidFill>
                 <a:latin typeface="Calibri"/>
               </a:rPr>
-              <a:t>Clase autonoma · sustentacion y cierre</a:t>
+              <a:t>Sustentacion en vivo del PI · cierre del curso</a:t>
             </a:r>
           </a:p>
         </p:txBody>
@@ -3619,7 +3619,7 @@
                 </a:solidFill>
                 <a:latin typeface="Calibri"/>
               </a:rPr>
-              <a:t>Actividad autonoma — pasos guiados</a:t>
+              <a:t>Sustentacion del PI — pasos guiados</a:t>
             </a:r>
           </a:p>
         </p:txBody>
@@ -3774,7 +3774,7 @@
                 </a:solidFill>
                 <a:latin typeface="Calibri"/>
               </a:rPr>
-              <a:t>Entregar paquete final en ExamLab (modulo Proyectos).</a:t>
+              <a:t>Subir el paquete final a ExamLab (modulo Proyectos) ANTES de su turno.</a:t>
             </a:r>
           </a:p>
         </p:txBody>
@@ -3929,7 +3929,7 @@
                 </a:solidFill>
                 <a:latin typeface="Calibri"/>
               </a:rPr>
-              <a:t>Sustentar 5-8 min (sincrono o asincrono).</a:t>
+              <a:t>Sustentar en vivo 5-8 min con el ER y una ejecucion real en pantalla.</a:t>
             </a:r>
           </a:p>
         </p:txBody>
@@ -4084,7 +4084,7 @@
                 </a:solidFill>
                 <a:latin typeface="Calibri"/>
               </a:rPr>
-              <a:t>Autoevaluacion: que harian distinto.</a:t>
+              <a:t>Responder el Q&amp;A en vivo del docente (preguntas al azar sobre su modelo).</a:t>
             </a:r>
           </a:p>
         </p:txBody>
@@ -4239,6 +4239,161 @@
                 </a:solidFill>
                 <a:latin typeface="Calibri"/>
               </a:rPr>
+              <a:t>Autoevaluacion: que harian distinto.</a:t>
+            </a:r>
+          </a:p>
+        </p:txBody>
+      </p:sp>
+      <p:sp>
+        <p:nvSpPr>
+          <p:cNvPr id="21" name="Rounded Rectangle 20"/>
+          <p:cNvSpPr/>
+          <p:nvPr/>
+        </p:nvSpPr>
+        <p:spPr>
+          <a:xfrm>
+            <a:off x="457200" y="4709160"/>
+            <a:ext cx="11277295" cy="777240"/>
+          </a:xfrm>
+          <a:prstGeom prst="roundRect">
+            <a:avLst>
+              <a:gd name="adj" fmla="val 12000"/>
+            </a:avLst>
+          </a:prstGeom>
+          <a:solidFill>
+            <a:srgbClr val="F2F2F2"/>
+          </a:solidFill>
+          <a:ln>
+            <a:noFill/>
+          </a:ln>
+        </p:spPr>
+        <p:style>
+          <a:lnRef idx="1">
+            <a:schemeClr val="accent1"/>
+          </a:lnRef>
+          <a:fillRef idx="3">
+            <a:schemeClr val="accent1"/>
+          </a:fillRef>
+          <a:effectRef idx="2">
+            <a:schemeClr val="accent1"/>
+          </a:effectRef>
+          <a:fontRef idx="minor">
+            <a:schemeClr val="lt1"/>
+          </a:fontRef>
+        </p:style>
+        <p:txBody>
+          <a:bodyPr rtlCol="0" anchor="ctr"/>
+          <a:lstStyle/>
+          <a:p>
+            <a:pPr algn="ctr"/>
+          </a:p>
+        </p:txBody>
+      </p:sp>
+      <p:sp>
+        <p:nvSpPr>
+          <p:cNvPr id="22" name="Rounded Rectangle 21"/>
+          <p:cNvSpPr/>
+          <p:nvPr/>
+        </p:nvSpPr>
+        <p:spPr>
+          <a:xfrm>
+            <a:off x="594360" y="4878324"/>
+            <a:ext cx="438912" cy="438912"/>
+          </a:xfrm>
+          <a:prstGeom prst="roundRect">
+            <a:avLst>
+              <a:gd name="adj" fmla="val 12000"/>
+            </a:avLst>
+          </a:prstGeom>
+          <a:solidFill>
+            <a:srgbClr val="095292"/>
+          </a:solidFill>
+          <a:ln>
+            <a:noFill/>
+          </a:ln>
+        </p:spPr>
+        <p:style>
+          <a:lnRef idx="1">
+            <a:schemeClr val="accent1"/>
+          </a:lnRef>
+          <a:fillRef idx="3">
+            <a:schemeClr val="accent1"/>
+          </a:fillRef>
+          <a:effectRef idx="2">
+            <a:schemeClr val="accent1"/>
+          </a:effectRef>
+          <a:fontRef idx="minor">
+            <a:schemeClr val="lt1"/>
+          </a:fontRef>
+        </p:style>
+        <p:txBody>
+          <a:bodyPr rtlCol="0" anchor="ctr"/>
+          <a:lstStyle/>
+          <a:p>
+            <a:pPr algn="ctr"/>
+          </a:p>
+        </p:txBody>
+      </p:sp>
+      <p:sp>
+        <p:nvSpPr>
+          <p:cNvPr id="23" name="TextBox 22"/>
+          <p:cNvSpPr txBox="1"/>
+          <p:nvPr/>
+        </p:nvSpPr>
+        <p:spPr>
+          <a:xfrm>
+            <a:off x="594360" y="4878324"/>
+            <a:ext cx="438912" cy="438912"/>
+          </a:xfrm>
+          <a:prstGeom prst="rect">
+            <a:avLst/>
+          </a:prstGeom>
+          <a:noFill/>
+        </p:spPr>
+        <p:txBody>
+          <a:bodyPr wrap="square" anchor="ctr"/>
+          <a:lstStyle/>
+          <a:p>
+            <a:pPr algn="ctr"/>
+            <a:r>
+              <a:rPr sz="1600" b="1" i="0">
+                <a:solidFill>
+                  <a:srgbClr val="FFFFFF"/>
+                </a:solidFill>
+                <a:latin typeface="Calibri"/>
+              </a:rPr>
+              <a:t>5</a:t>
+            </a:r>
+          </a:p>
+        </p:txBody>
+      </p:sp>
+      <p:sp>
+        <p:nvSpPr>
+          <p:cNvPr id="24" name="TextBox 23"/>
+          <p:cNvSpPr txBox="1"/>
+          <p:nvPr/>
+        </p:nvSpPr>
+        <p:spPr>
+          <a:xfrm>
+            <a:off x="1188720" y="4800600"/>
+            <a:ext cx="10271455" cy="612647"/>
+          </a:xfrm>
+          <a:prstGeom prst="rect">
+            <a:avLst/>
+          </a:prstGeom>
+          <a:noFill/>
+        </p:spPr>
+        <p:txBody>
+          <a:bodyPr wrap="square" anchor="ctr"/>
+          <a:lstStyle/>
+          <a:p>
+            <a:r>
+              <a:rPr sz="1500" b="1" i="0">
+                <a:solidFill>
+                  <a:srgbClr val="095292"/>
+                </a:solidFill>
+                <a:latin typeface="Calibri"/>
+              </a:rPr>
               <a:t>Cierre del curso.</a:t>
             </a:r>
           </a:p>
@@ -4246,7 +4401,7 @@
       </p:sp>
       <p:sp>
         <p:nvSpPr>
-          <p:cNvPr id="21" name="TextBox 20"/>
+          <p:cNvPr id="25" name="TextBox 24"/>
           <p:cNvSpPr txBox="1"/>
           <p:nvPr/>
         </p:nvSpPr>
@@ -4420,7 +4575,7 @@
                 </a:solidFill>
                 <a:latin typeface="Calibri"/>
               </a:rPr>
-              <a:t>Actividad autonoma — pistas (checklist vacio)</a:t>
+              <a:t>Sustentacion del PI — pistas (checklist vacio)</a:t>
             </a:r>
           </a:p>
         </p:txBody>
@@ -5153,7 +5308,7 @@
                 </a:solidFill>
                 <a:latin typeface="Calibri"/>
               </a:rPr>
-              <a:t> ZIP/PDF final + video o Meet segun indique docente</a:t>
+              <a:t> ZIP/PDF final subido antes del turno + sustentacion en vivo 5-8 min + Q&amp;A</a:t>
             </a:r>
           </a:p>
           <a:p>
@@ -5169,7 +5324,7 @@
                 </a:solidFill>
                 <a:latin typeface="Calibri"/>
               </a:rPr>
-              <a:t>–   Evidencia en playground (enlace) o archivo SQL/PNG propio.</a:t>
+              <a:t>–   Evidencia ejecutable en pantalla durante tu turno (no solo capturas).</a:t>
             </a:r>
           </a:p>
           <a:p>
@@ -5185,7 +5340,25 @@
                 </a:solidFill>
                 <a:latin typeface="Calibri"/>
               </a:rPr>
-              <a:t>–   Actualizar checklist PI (que criterio de rubrica avanzo).</a:t>
+              <a:t>–   Puedes explicar </a:t>
+            </a:r>
+            <a:r>
+              <a:rPr sz="1600" b="1" i="0">
+                <a:solidFill>
+                  <a:srgbClr val="333333"/>
+                </a:solidFill>
+                <a:latin typeface="Calibri"/>
+              </a:rPr>
+              <a:t>cualquier</a:t>
+            </a:r>
+            <a:r>
+              <a:rPr sz="1600" b="0" i="0">
+                <a:solidFill>
+                  <a:srgbClr val="333333"/>
+                </a:solidFill>
+                <a:latin typeface="Calibri"/>
+              </a:rPr>
+              <a:t> parte de tu modelo en 60 segundos.</a:t>
             </a:r>
           </a:p>
           <a:p>
@@ -5219,7 +5392,25 @@
                 </a:solidFill>
                 <a:latin typeface="Calibri"/>
               </a:rPr>
-              <a:t> (https://examlab.lovable.app/) — domingo 23:59 cuando aplique taller.</a:t>
+              <a:t> (https://examlab.lovable.app/ · módulo Proyectos) — </a:t>
+            </a:r>
+            <a:r>
+              <a:rPr sz="1600" b="1" i="0">
+                <a:solidFill>
+                  <a:srgbClr val="333333"/>
+                </a:solidFill>
+                <a:latin typeface="Calibri"/>
+              </a:rPr>
+              <a:t>antes</a:t>
+            </a:r>
+            <a:r>
+              <a:rPr sz="1600" b="0" i="0">
+                <a:solidFill>
+                  <a:srgbClr val="333333"/>
+                </a:solidFill>
+                <a:latin typeface="Calibri"/>
+              </a:rPr>
+              <a:t> de tu turno.</a:t>
             </a:r>
           </a:p>
         </p:txBody>
@@ -5400,7 +5591,7 @@
                 </a:solidFill>
                 <a:latin typeface="Calibri"/>
               </a:rPr>
-              <a:t>Para el PI esta semana</a:t>
+              <a:t>Cierre del PI</a:t>
             </a:r>
           </a:p>
         </p:txBody>
@@ -5538,7 +5729,7 @@
                 </a:solidFill>
                 <a:latin typeface="Calibri"/>
               </a:rPr>
-              <a:t>Hito: Sustentacion / entrega final del PI (20% Corte 3)</a:t>
+              <a:t>Hito: Sustentacion en vivo y entrega final del PI (20% Corte 3)</a:t>
             </a:r>
           </a:p>
         </p:txBody>
@@ -5676,7 +5867,7 @@
                 </a:solidFill>
                 <a:latin typeface="Calibri"/>
               </a:rPr>
-              <a:t>Enunciado completo: Clases/Proyecto Integrador/ (VetCare DB).</a:t>
+              <a:t>Enunciado completo y rubrica: Clases/Proyecto Integrador/ (VetCare DB).</a:t>
             </a:r>
           </a:p>
         </p:txBody>
@@ -5814,7 +6005,7 @@
                 </a:solidFill>
                 <a:latin typeface="Calibri"/>
               </a:rPr>
-              <a:t>Taller de la semana en ExamLab (https://examlab.lovable.app/): domingo 23:59 (regla del Acuerdo) cuando aplique.</a:t>
+              <a:t>El PI vale 20% del Corte 3 y NO reemplaza el Parcial 3, que ya se aplico en su propia sesion.</a:t>
             </a:r>
           </a:p>
         </p:txBody>
@@ -5975,7 +6166,7 @@
                 </a:solidFill>
                 <a:latin typeface="Calibri"/>
               </a:rPr>
-              <a:t>Clase 15 · VetCare avanza</a:t>
+              <a:t>Clase 15 · cierre de VetCare DB</a:t>
             </a:r>
           </a:p>
         </p:txBody>
@@ -6014,7 +6205,7 @@
                 </a:solidFill>
                 <a:latin typeface="Calibri"/>
               </a:rPr>
-              <a:t>Sustentacion / entrega final del PI (20% Corte 3)</a:t>
+              <a:t>Sustentacion en vivo y entrega final del PI (20% Corte 3)</a:t>
             </a:r>
           </a:p>
           <a:p>
@@ -6030,7 +6221,7 @@
                 </a:solidFill>
                 <a:latin typeface="Calibri"/>
               </a:rPr>
-              <a:t>Entregable: ZIP/PDF final + video o Meet segun indique docente</a:t>
+              <a:t>Entregable: ZIP/PDF final subido antes del turno + sustentacion en vivo 5-8 min + Q&amp;A</a:t>
             </a:r>
           </a:p>
           <a:p>
@@ -6046,7 +6237,7 @@
                 </a:solidFill>
                 <a:latin typeface="Calibri"/>
               </a:rPr>
-              <a:t>Siguiente clase: continuar el hilo del PI segun plan</a:t>
+              <a:t>Conserva el paquete (ER, DDL, roles, procs, triggers, optimizacion) como portafolio</a:t>
             </a:r>
           </a:p>
         </p:txBody>
@@ -6081,7 +6272,7 @@
                 </a:solidFill>
                 <a:latin typeface="Calibri"/>
               </a:rPr>
-              <a:t>Teoria breve · practica = PI</a:t>
+              <a:t>Sustentar es justificar decisiones, no describir tablas</a:t>
             </a:r>
           </a:p>
         </p:txBody>
@@ -6275,7 +6466,7 @@
                 </a:solidFill>
                 <a:latin typeface="Calibri"/>
               </a:rPr>
-              <a:t>Hoy avanzamos el PI en:</a:t>
+              <a:t>Hoy cerramos el PI:</a:t>
             </a:r>
             <a:r>
               <a:rPr sz="1600" b="0" i="0">
@@ -6284,7 +6475,7 @@
                 </a:solidFill>
                 <a:latin typeface="Calibri"/>
               </a:rPr>
-              <a:t> Sustentacion / entrega final del PI (20% Corte 3)</a:t>
+              <a:t> Sustentacion en vivo y entrega final del PI (20% Corte 3)</a:t>
             </a:r>
           </a:p>
           <a:p>
@@ -6300,7 +6491,7 @@
                 </a:solidFill>
                 <a:latin typeface="Calibri"/>
               </a:rPr>
-              <a:t>–   Herramienta: </a:t>
+              <a:t>–   Sesión </a:t>
             </a:r>
             <a:r>
               <a:rPr sz="1600" b="1" i="0">
@@ -6309,7 +6500,7 @@
                 </a:solidFill>
                 <a:latin typeface="Calibri"/>
               </a:rPr>
-              <a:t>ExamLab (Proyectos) + slides propias</a:t>
+              <a:t>síncrona</a:t>
             </a:r>
             <a:r>
               <a:rPr sz="1600" b="0" i="0">
@@ -6318,7 +6509,7 @@
                 </a:solidFill>
                 <a:latin typeface="Calibri"/>
               </a:rPr>
-              <a:t> · Bloque </a:t>
+              <a:t> de sustentaciones · Bloque </a:t>
             </a:r>
             <a:r>
               <a:rPr sz="1600" b="1" i="0">
@@ -6336,7 +6527,7 @@
                 </a:solidFill>
                 <a:latin typeface="Calibri"/>
               </a:rPr>
-              <a:t> · Teoría breve · Taller PI</a:t>
+              <a:t> · turnos consecutivos.</a:t>
             </a:r>
           </a:p>
           <a:p>
@@ -6370,7 +6561,7 @@
                 </a:solidFill>
                 <a:latin typeface="Calibri"/>
               </a:rPr>
-              <a:t> ZIP/PDF final + video o Meet segun indique docente</a:t>
+              <a:t> ZIP/PDF final subido antes del turno + sustentacion en vivo 5-8 min + Q&amp;A</a:t>
             </a:r>
           </a:p>
           <a:p>
@@ -6386,7 +6577,25 @@
                 </a:solidFill>
                 <a:latin typeface="Calibri"/>
               </a:rPr>
-              <a:t>–   Gratis + navegador · free tier · sin software de pago obligatorio.</a:t>
+              <a:t>–   Sube el paquete a ExamLab </a:t>
+            </a:r>
+            <a:r>
+              <a:rPr sz="1600" b="1" i="0">
+                <a:solidFill>
+                  <a:srgbClr val="333333"/>
+                </a:solidFill>
+                <a:latin typeface="Calibri"/>
+              </a:rPr>
+              <a:t>antes</a:t>
+            </a:r>
+            <a:r>
+              <a:rPr sz="1600" b="0" i="0">
+                <a:solidFill>
+                  <a:srgbClr val="333333"/>
+                </a:solidFill>
+                <a:latin typeface="Calibri"/>
+              </a:rPr>
+              <a:t> de tu turno: presentando no se sube nada.</a:t>
             </a:r>
           </a:p>
           <a:p>
@@ -6402,15 +6611,17 @@
                 </a:solidFill>
                 <a:latin typeface="Calibri"/>
               </a:rPr>
-              <a:t>–   La teoría no es un tema aislado: alimenta evidencias de la rúbrica del PI.</a:t>
-            </a:r>
-          </a:p>
-          <a:p>
-            <a:pPr>
-              <a:spcAft>
-                <a:spcPts val="800"/>
-              </a:spcAft>
-            </a:pPr>
+              <a:t>–   La sustentación es </a:t>
+            </a:r>
+            <a:r>
+              <a:rPr sz="1600" b="1" i="0">
+                <a:solidFill>
+                  <a:srgbClr val="333333"/>
+                </a:solidFill>
+                <a:latin typeface="Calibri"/>
+              </a:rPr>
+              <a:t>en vivo</a:t>
+            </a:r>
             <a:r>
               <a:rPr sz="1600" b="0" i="0">
                 <a:solidFill>
@@ -6418,7 +6629,7 @@
                 </a:solidFill>
                 <a:latin typeface="Calibri"/>
               </a:rPr>
-              <a:t>–   Al salir: avance concreto en su paquete VetCare.</a:t>
+              <a:t> y con preguntas: no se reemplaza por video grabado.</a:t>
             </a:r>
           </a:p>
         </p:txBody>
@@ -6655,7 +6866,7 @@
         </p:nvSpPr>
         <p:spPr>
           <a:xfrm>
-            <a:off x="1438625" y="2066543"/>
+            <a:off x="2190445" y="2066543"/>
             <a:ext cx="292608" cy="292608"/>
           </a:xfrm>
           <a:prstGeom prst="roundRect">
@@ -6701,7 +6912,7 @@
         <p:spPr>
           <a:xfrm>
             <a:off x="457200" y="1353312"/>
-            <a:ext cx="2255459" cy="502920"/>
+            <a:ext cx="3759098" cy="502920"/>
           </a:xfrm>
           <a:prstGeom prst="rect">
             <a:avLst/>
@@ -6736,7 +6947,7 @@
         <p:spPr>
           <a:xfrm>
             <a:off x="502920" y="2587752"/>
-            <a:ext cx="2164019" cy="2560320"/>
+            <a:ext cx="3667658" cy="2560320"/>
           </a:xfrm>
           <a:prstGeom prst="rect">
             <a:avLst/>
@@ -6757,7 +6968,7 @@
                 </a:solidFill>
                 <a:latin typeface="Calibri"/>
               </a:rPr>
-              <a:t>Encuadre · clase autonoma (festivo) · VetCare</a:t>
+              <a:t>Encuadre · sorteo del orden de turnos</a:t>
             </a:r>
           </a:p>
         </p:txBody>
@@ -6770,7 +6981,7 @@
         </p:nvSpPr>
         <p:spPr>
           <a:xfrm>
-            <a:off x="3694084" y="2066543"/>
+            <a:off x="5949543" y="2066543"/>
             <a:ext cx="292608" cy="292608"/>
           </a:xfrm>
           <a:prstGeom prst="roundRect">
@@ -6815,8 +7026,8 @@
         </p:nvSpPr>
         <p:spPr>
           <a:xfrm>
-            <a:off x="2712659" y="1353312"/>
-            <a:ext cx="2255459" cy="502920"/>
+            <a:off x="4216298" y="1353312"/>
+            <a:ext cx="3759098" cy="502920"/>
           </a:xfrm>
           <a:prstGeom prst="rect">
             <a:avLst/>
@@ -6837,7 +7048,7 @@
                 </a:solidFill>
                 <a:latin typeface="Calibri"/>
               </a:rPr>
-              <a:t>10-35</a:t>
+              <a:t>10-110</a:t>
             </a:r>
           </a:p>
         </p:txBody>
@@ -6850,8 +7061,8 @@
         </p:nvSpPr>
         <p:spPr>
           <a:xfrm>
-            <a:off x="2758379" y="2587752"/>
-            <a:ext cx="2164019" cy="2560320"/>
+            <a:off x="4262018" y="2587752"/>
+            <a:ext cx="3667658" cy="2560320"/>
           </a:xfrm>
           <a:prstGeom prst="rect">
             <a:avLst/>
@@ -6872,7 +7083,7 @@
                 </a:solidFill>
                 <a:latin typeface="Calibri"/>
               </a:rPr>
-              <a:t>Teoría Core breve (al servicio del PI)</a:t>
+              <a:t>Sustentaciones: 5-8 min de pitch + Q&amp;A por turno</a:t>
             </a:r>
           </a:p>
         </p:txBody>
@@ -6885,7 +7096,7 @@
         </p:nvSpPr>
         <p:spPr>
           <a:xfrm>
-            <a:off x="5949543" y="2066543"/>
+            <a:off x="9708642" y="2066543"/>
             <a:ext cx="292608" cy="292608"/>
           </a:xfrm>
           <a:prstGeom prst="roundRect">
@@ -6930,8 +7141,8 @@
         </p:nvSpPr>
         <p:spPr>
           <a:xfrm>
-            <a:off x="4968118" y="1353312"/>
-            <a:ext cx="2255459" cy="502920"/>
+            <a:off x="7975396" y="1353312"/>
+            <a:ext cx="3759098" cy="502920"/>
           </a:xfrm>
           <a:prstGeom prst="rect">
             <a:avLst/>
@@ -6952,7 +7163,7 @@
                 </a:solidFill>
                 <a:latin typeface="Calibri"/>
               </a:rPr>
-              <a:t>35-55</a:t>
+              <a:t>110-120</a:t>
             </a:r>
           </a:p>
         </p:txBody>
@@ -6965,8 +7176,8 @@
         </p:nvSpPr>
         <p:spPr>
           <a:xfrm>
-            <a:off x="5013838" y="2587752"/>
-            <a:ext cx="2164019" cy="2560320"/>
+            <a:off x="8021116" y="2587752"/>
+            <a:ext cx="3667658" cy="2560320"/>
           </a:xfrm>
           <a:prstGeom prst="rect">
             <a:avLst/>
@@ -6987,66 +7198,21 @@
                 </a:solidFill>
                 <a:latin typeface="Calibri"/>
               </a:rPr>
-              <a:t>Demo con la herramienta del día</a:t>
-            </a:r>
-          </a:p>
-        </p:txBody>
-      </p:sp>
-      <p:sp>
-        <p:nvSpPr>
-          <p:cNvPr id="15" name="Rounded Rectangle 14"/>
-          <p:cNvSpPr/>
-          <p:nvPr/>
-        </p:nvSpPr>
-        <p:spPr>
-          <a:xfrm>
-            <a:off x="8205002" y="2066543"/>
-            <a:ext cx="292608" cy="292608"/>
-          </a:xfrm>
-          <a:prstGeom prst="roundRect">
-            <a:avLst>
-              <a:gd name="adj" fmla="val 12000"/>
-            </a:avLst>
-          </a:prstGeom>
-          <a:solidFill>
-            <a:srgbClr val="269CCB"/>
-          </a:solidFill>
-          <a:ln>
-            <a:noFill/>
-          </a:ln>
-        </p:spPr>
-        <p:style>
-          <a:lnRef idx="1">
-            <a:schemeClr val="accent1"/>
-          </a:lnRef>
-          <a:fillRef idx="3">
-            <a:schemeClr val="accent1"/>
-          </a:fillRef>
-          <a:effectRef idx="2">
-            <a:schemeClr val="accent1"/>
-          </a:effectRef>
-          <a:fontRef idx="minor">
-            <a:schemeClr val="lt1"/>
-          </a:fontRef>
-        </p:style>
-        <p:txBody>
-          <a:bodyPr rtlCol="0" anchor="ctr"/>
-          <a:lstStyle/>
-          <a:p>
-            <a:pPr algn="ctr"/>
-          </a:p>
-        </p:txBody>
-      </p:sp>
-      <p:sp>
-        <p:nvSpPr>
-          <p:cNvPr id="16" name="TextBox 15"/>
+              <a:t>Cierre del curso · autoevaluacion</a:t>
+            </a:r>
+          </a:p>
+        </p:txBody>
+      </p:sp>
+      <p:sp>
+        <p:nvSpPr>
+          <p:cNvPr id="15" name="TextBox 14"/>
           <p:cNvSpPr txBox="1"/>
           <p:nvPr/>
         </p:nvSpPr>
         <p:spPr>
           <a:xfrm>
-            <a:off x="7223577" y="1353312"/>
-            <a:ext cx="2255459" cy="502920"/>
+            <a:off x="457200" y="5943600"/>
+            <a:ext cx="11277295" cy="365760"/>
           </a:xfrm>
           <a:prstGeom prst="rect">
             <a:avLst/>
@@ -7061,191 +7227,6 @@
           <a:p>
             <a:pPr algn="ctr"/>
             <a:r>
-              <a:rPr sz="1300" b="1" i="0">
-                <a:solidFill>
-                  <a:srgbClr val="095292"/>
-                </a:solidFill>
-                <a:latin typeface="Calibri"/>
-              </a:rPr>
-              <a:t>55-105</a:t>
-            </a:r>
-          </a:p>
-        </p:txBody>
-      </p:sp>
-      <p:sp>
-        <p:nvSpPr>
-          <p:cNvPr id="17" name="TextBox 16"/>
-          <p:cNvSpPr txBox="1"/>
-          <p:nvPr/>
-        </p:nvSpPr>
-        <p:spPr>
-          <a:xfrm>
-            <a:off x="7269297" y="2587752"/>
-            <a:ext cx="2164019" cy="2560320"/>
-          </a:xfrm>
-          <a:prstGeom prst="rect">
-            <a:avLst/>
-          </a:prstGeom>
-          <a:noFill/>
-        </p:spPr>
-        <p:txBody>
-          <a:bodyPr wrap="square">
-            <a:spAutoFit/>
-          </a:bodyPr>
-          <a:lstStyle/>
-          <a:p>
-            <a:pPr algn="ctr"/>
-            <a:r>
-              <a:rPr sz="1300" b="0" i="0">
-                <a:solidFill>
-                  <a:srgbClr val="333333"/>
-                </a:solidFill>
-                <a:latin typeface="Calibri"/>
-              </a:rPr>
-              <a:t>Taller guiado = tarea del PI</a:t>
-            </a:r>
-          </a:p>
-        </p:txBody>
-      </p:sp>
-      <p:sp>
-        <p:nvSpPr>
-          <p:cNvPr id="18" name="Rounded Rectangle 17"/>
-          <p:cNvSpPr/>
-          <p:nvPr/>
-        </p:nvSpPr>
-        <p:spPr>
-          <a:xfrm>
-            <a:off x="10460461" y="2066543"/>
-            <a:ext cx="292608" cy="292608"/>
-          </a:xfrm>
-          <a:prstGeom prst="roundRect">
-            <a:avLst>
-              <a:gd name="adj" fmla="val 12000"/>
-            </a:avLst>
-          </a:prstGeom>
-          <a:solidFill>
-            <a:srgbClr val="095292"/>
-          </a:solidFill>
-          <a:ln>
-            <a:noFill/>
-          </a:ln>
-        </p:spPr>
-        <p:style>
-          <a:lnRef idx="1">
-            <a:schemeClr val="accent1"/>
-          </a:lnRef>
-          <a:fillRef idx="3">
-            <a:schemeClr val="accent1"/>
-          </a:fillRef>
-          <a:effectRef idx="2">
-            <a:schemeClr val="accent1"/>
-          </a:effectRef>
-          <a:fontRef idx="minor">
-            <a:schemeClr val="lt1"/>
-          </a:fontRef>
-        </p:style>
-        <p:txBody>
-          <a:bodyPr rtlCol="0" anchor="ctr"/>
-          <a:lstStyle/>
-          <a:p>
-            <a:pPr algn="ctr"/>
-          </a:p>
-        </p:txBody>
-      </p:sp>
-      <p:sp>
-        <p:nvSpPr>
-          <p:cNvPr id="19" name="TextBox 18"/>
-          <p:cNvSpPr txBox="1"/>
-          <p:nvPr/>
-        </p:nvSpPr>
-        <p:spPr>
-          <a:xfrm>
-            <a:off x="9479036" y="1353312"/>
-            <a:ext cx="2255459" cy="502920"/>
-          </a:xfrm>
-          <a:prstGeom prst="rect">
-            <a:avLst/>
-          </a:prstGeom>
-          <a:noFill/>
-        </p:spPr>
-        <p:txBody>
-          <a:bodyPr wrap="square">
-            <a:spAutoFit/>
-          </a:bodyPr>
-          <a:lstStyle/>
-          <a:p>
-            <a:pPr algn="ctr"/>
-            <a:r>
-              <a:rPr sz="1300" b="1" i="0">
-                <a:solidFill>
-                  <a:srgbClr val="095292"/>
-                </a:solidFill>
-                <a:latin typeface="Calibri"/>
-              </a:rPr>
-              <a:t>105-120</a:t>
-            </a:r>
-          </a:p>
-        </p:txBody>
-      </p:sp>
-      <p:sp>
-        <p:nvSpPr>
-          <p:cNvPr id="20" name="TextBox 19"/>
-          <p:cNvSpPr txBox="1"/>
-          <p:nvPr/>
-        </p:nvSpPr>
-        <p:spPr>
-          <a:xfrm>
-            <a:off x="9524756" y="2587752"/>
-            <a:ext cx="2164019" cy="2560320"/>
-          </a:xfrm>
-          <a:prstGeom prst="rect">
-            <a:avLst/>
-          </a:prstGeom>
-          <a:noFill/>
-        </p:spPr>
-        <p:txBody>
-          <a:bodyPr wrap="square">
-            <a:spAutoFit/>
-          </a:bodyPr>
-          <a:lstStyle/>
-          <a:p>
-            <a:pPr algn="ctr"/>
-            <a:r>
-              <a:rPr sz="1300" b="0" i="0">
-                <a:solidFill>
-                  <a:srgbClr val="333333"/>
-                </a:solidFill>
-                <a:latin typeface="Calibri"/>
-              </a:rPr>
-              <a:t>Criterios de exito · cierre · dudas del PI</a:t>
-            </a:r>
-          </a:p>
-        </p:txBody>
-      </p:sp>
-      <p:sp>
-        <p:nvSpPr>
-          <p:cNvPr id="21" name="TextBox 20"/>
-          <p:cNvSpPr txBox="1"/>
-          <p:nvPr/>
-        </p:nvSpPr>
-        <p:spPr>
-          <a:xfrm>
-            <a:off x="457200" y="5943600"/>
-            <a:ext cx="11277295" cy="365760"/>
-          </a:xfrm>
-          <a:prstGeom prst="rect">
-            <a:avLst/>
-          </a:prstGeom>
-          <a:noFill/>
-        </p:spPr>
-        <p:txBody>
-          <a:bodyPr wrap="square">
-            <a:spAutoFit/>
-          </a:bodyPr>
-          <a:lstStyle/>
-          <a:p>
-            <a:pPr algn="ctr"/>
-            <a:r>
               <a:rPr sz="1200" b="0" i="1">
                 <a:solidFill>
                   <a:srgbClr val="666666"/>
@@ -7277,7 +7258,7 @@
       </p:sp>
       <p:sp>
         <p:nvSpPr>
-          <p:cNvPr id="22" name="TextBox 21"/>
+          <p:cNvPr id="16" name="TextBox 15"/>
           <p:cNvSpPr txBox="1"/>
           <p:nvPr/>
         </p:nvSpPr>
@@ -7703,7 +7684,7 @@
                 </a:solidFill>
                 <a:latin typeface="Calibri"/>
               </a:rPr>
-              <a:t>Demo del dia</a:t>
+              <a:t>Como se ordena la sesion de hoy</a:t>
             </a:r>
           </a:p>
         </p:txBody>
@@ -7742,7 +7723,7 @@
                 </a:solidFill>
                 <a:latin typeface="Calibri"/>
               </a:rPr>
-              <a:t>–   </a:t>
+              <a:t>–   Sustentación </a:t>
             </a:r>
             <a:r>
               <a:rPr sz="1600" b="1" i="0">
@@ -7751,7 +7732,7 @@
                 </a:solidFill>
                 <a:latin typeface="Calibri"/>
               </a:rPr>
-              <a:t>Herramienta:</a:t>
+              <a:t>en vivo</a:t>
             </a:r>
             <a:r>
               <a:rPr sz="1600" b="0" i="0">
@@ -7760,7 +7741,7 @@
                 </a:solidFill>
                 <a:latin typeface="Calibri"/>
               </a:rPr>
-              <a:t> ExamLab (Proyectos) + slides propias</a:t>
+              <a:t>, en este bloque: no se reemplaza por video grabado.</a:t>
             </a:r>
           </a:p>
           <a:p>
@@ -7776,7 +7757,7 @@
                 </a:solidFill>
                 <a:latin typeface="Calibri"/>
               </a:rPr>
-              <a:t>–   </a:t>
+              <a:t>–   Turnos de </a:t>
             </a:r>
             <a:r>
               <a:rPr sz="1600" b="1" i="0">
@@ -7785,7 +7766,7 @@
                 </a:solidFill>
                 <a:latin typeface="Calibri"/>
               </a:rPr>
-              <a:t>Demo:</a:t>
+              <a:t>5–8 min de pitch + Q&amp;A</a:t>
             </a:r>
             <a:r>
               <a:rPr sz="1600" b="0" i="0">
@@ -7794,7 +7775,7 @@
                 </a:solidFill>
                 <a:latin typeface="Calibri"/>
               </a:rPr>
-              <a:t> Checklist final de empaquetado del ZIP.</a:t>
+              <a:t>; el orden se sortea al empezar.</a:t>
             </a:r>
           </a:p>
           <a:p>
@@ -7810,7 +7791,16 @@
                 </a:solidFill>
                 <a:latin typeface="Calibri"/>
               </a:rPr>
-              <a:t>–   Sigan el mismo dominio VetCare (no inventen otro caso).</a:t>
+              <a:t>–   Ten listo: </a:t>
+            </a:r>
+            <a:r>
+              <a:rPr sz="1600" b="1" i="0">
+                <a:solidFill>
+                  <a:srgbClr val="333333"/>
+                </a:solidFill>
+                <a:latin typeface="Calibri"/>
+              </a:rPr>
+              <a:t>ZIP/PDF final subido antes del turno + sustentacion en vivo 5-8 min + Q&amp;A</a:t>
             </a:r>
           </a:p>
           <a:p>
@@ -7826,7 +7816,41 @@
                 </a:solidFill>
                 <a:latin typeface="Calibri"/>
               </a:rPr>
-              <a:t>–   Al final de la demo: dejar enlace/script compartible al grupo.</a:t>
+              <a:t>–   En tu turno muestra una </a:t>
+            </a:r>
+            <a:r>
+              <a:rPr sz="1600" b="1" i="0">
+                <a:solidFill>
+                  <a:srgbClr val="333333"/>
+                </a:solidFill>
+                <a:latin typeface="Calibri"/>
+              </a:rPr>
+              <a:t>ejecución real</a:t>
+            </a:r>
+            <a:r>
+              <a:rPr sz="1600" b="0" i="0">
+                <a:solidFill>
+                  <a:srgbClr val="333333"/>
+                </a:solidFill>
+                <a:latin typeface="Calibri"/>
+              </a:rPr>
+              <a:t> (procedimiento OK + caso rechazado), no solo capturas.</a:t>
+            </a:r>
+          </a:p>
+          <a:p>
+            <a:pPr>
+              <a:spcAft>
+                <a:spcPts val="800"/>
+              </a:spcAft>
+            </a:pPr>
+            <a:r>
+              <a:rPr sz="1600" b="0" i="0">
+                <a:solidFill>
+                  <a:srgbClr val="333333"/>
+                </a:solidFill>
+                <a:latin typeface="Calibri"/>
+              </a:rPr>
+              <a:t>–   Mientras otros presentan, escuchas: el cierre del curso se hace con todo el grupo.</a:t>
             </a:r>
           </a:p>
         </p:txBody>
@@ -8834,7 +8858,7 @@
                 </a:solidFill>
                 <a:latin typeface="Calibri"/>
               </a:rPr>
-              <a:t>Actividad autonoma — contexto / por que importa</a:t>
+              <a:t>Sustentacion del PI — contexto / por que importa</a:t>
             </a:r>
           </a:p>
         </p:txBody>
@@ -9088,7 +9112,7 @@
                 </a:solidFill>
                 <a:latin typeface="Calibri"/>
               </a:rPr>
-              <a:t>Actividad autonoma — objetivo y criterios</a:t>
+              <a:t>Sustentacion del PI — objetivo y criterios</a:t>
             </a:r>
           </a:p>
         </p:txBody>
@@ -9145,7 +9169,7 @@
                 </a:solidFill>
                 <a:latin typeface="Calibri"/>
               </a:rPr>
-              <a:t> Paquete final + sustentacion 5-8 min.</a:t>
+              <a:t> Paquete final entregado + sustentacion en vivo de 5-8 min con Q&amp;A.</a:t>
             </a:r>
           </a:p>
           <a:p>
@@ -9179,7 +9203,7 @@
                 </a:solidFill>
                 <a:latin typeface="Calibri"/>
               </a:rPr>
-              <a:t> ZIP/PDF en ExamLab.</a:t>
+              <a:t> ZIP/PDF en ExamLab ANTES del turno.</a:t>
             </a:r>
           </a:p>
           <a:p>
@@ -9213,7 +9237,41 @@
                 </a:solidFill>
                 <a:latin typeface="Calibri"/>
               </a:rPr>
-              <a:t> Sustentacion 5-8 min.</a:t>
+              <a:t> Sustentacion en vivo de 5-8 min.</a:t>
+            </a:r>
+          </a:p>
+          <a:p>
+            <a:pPr>
+              <a:spcAft>
+                <a:spcPts val="800"/>
+              </a:spcAft>
+            </a:pPr>
+            <a:r>
+              <a:rPr sz="1500" b="0" i="0">
+                <a:solidFill>
+                  <a:srgbClr val="333333"/>
+                </a:solidFill>
+                <a:latin typeface="Calibri"/>
+              </a:rPr>
+              <a:t>–   </a:t>
+            </a:r>
+            <a:r>
+              <a:rPr sz="1500" b="1" i="0">
+                <a:solidFill>
+                  <a:srgbClr val="333333"/>
+                </a:solidFill>
+                <a:latin typeface="Calibri"/>
+              </a:rPr>
+              <a:t>Exito:</a:t>
+            </a:r>
+            <a:r>
+              <a:rPr sz="1500" b="0" i="0">
+                <a:solidFill>
+                  <a:srgbClr val="333333"/>
+                </a:solidFill>
+                <a:latin typeface="Calibri"/>
+              </a:rPr>
+              <a:t> Q&amp;A respondido en vivo (preguntas al azar).</a:t>
             </a:r>
           </a:p>
           <a:p>
@@ -9462,7 +9520,7 @@
                 </a:solidFill>
                 <a:latin typeface="Calibri"/>
               </a:rPr>
-              <a:t>Actividad autonoma — escenario / datos de partida</a:t>
+              <a:t>Sustentacion del PI — escenario / datos de partida</a:t>
             </a:r>
           </a:p>
         </p:txBody>
@@ -9502,6 +9560,22 @@
                 <a:latin typeface="Calibri"/>
               </a:rPr>
               <a:t>–   Checklist empaquetado del enunciado PI.</a:t>
+            </a:r>
+          </a:p>
+          <a:p>
+            <a:pPr>
+              <a:spcAft>
+                <a:spcPts val="800"/>
+              </a:spcAft>
+            </a:pPr>
+            <a:r>
+              <a:rPr sz="1600" b="0" i="0">
+                <a:solidFill>
+                  <a:srgbClr val="333333"/>
+                </a:solidFill>
+                <a:latin typeface="Calibri"/>
+              </a:rPr>
+              <a:t>–   Turnos consecutivos en el bloque; el orden se sortea al abrir la sesion.</a:t>
             </a:r>
           </a:p>
         </p:txBody>

--- a/Bases de Datos II/Clases/Clase 15 - Presentacion del proyecto y cierre/Presentacion.pptx
+++ b/Bases de Datos II/Clases/Clase 15 - Presentacion del proyecto y cierre/Presentacion.pptx
@@ -5392,7 +5392,7 @@
                 </a:solidFill>
                 <a:latin typeface="Calibri"/>
               </a:rPr>
-              <a:t> (https://examlab.lovable.app/ · módulo Proyectos) — </a:t>
+              <a:t> (https://uniaj.examlab.workers.dev/ · módulo Proyectos) — </a:t>
             </a:r>
             <a:r>
               <a:rPr sz="1600" b="1" i="0">

--- a/Bases de Datos II/Clases/Clase 15 - Presentacion del proyecto y cierre/Presentacion.pptx
+++ b/Bases de Datos II/Clases/Clase 15 - Presentacion del proyecto y cierre/Presentacion.pptx
@@ -3633,7 +3633,7 @@
         <p:spPr>
           <a:xfrm>
             <a:off x="457200" y="1234440"/>
-            <a:ext cx="11277295" cy="777240"/>
+            <a:ext cx="11277295" cy="950976"/>
           </a:xfrm>
           <a:prstGeom prst="roundRect">
             <a:avLst>
@@ -3677,7 +3677,7 @@
         </p:nvSpPr>
         <p:spPr>
           <a:xfrm>
-            <a:off x="594360" y="1403604"/>
+            <a:off x="594360" y="1490472"/>
             <a:ext cx="438912" cy="438912"/>
           </a:xfrm>
           <a:prstGeom prst="roundRect">
@@ -3722,7 +3722,7 @@
         </p:nvSpPr>
         <p:spPr>
           <a:xfrm>
-            <a:off x="594360" y="1403604"/>
+            <a:off x="594360" y="1490472"/>
             <a:ext cx="438912" cy="438912"/>
           </a:xfrm>
           <a:prstGeom prst="rect">
@@ -3756,7 +3756,7 @@
         <p:spPr>
           <a:xfrm>
             <a:off x="1188720" y="1325880"/>
-            <a:ext cx="10271455" cy="612647"/>
+            <a:ext cx="10271455" cy="786384"/>
           </a:xfrm>
           <a:prstGeom prst="rect">
             <a:avLst/>
@@ -3787,8 +3787,8 @@
         </p:nvSpPr>
         <p:spPr>
           <a:xfrm>
-            <a:off x="457200" y="2103120"/>
-            <a:ext cx="11277295" cy="777240"/>
+            <a:off x="457200" y="2276856"/>
+            <a:ext cx="11277295" cy="950976"/>
           </a:xfrm>
           <a:prstGeom prst="roundRect">
             <a:avLst>
@@ -3832,7 +3832,7 @@
         </p:nvSpPr>
         <p:spPr>
           <a:xfrm>
-            <a:off x="594360" y="2272284"/>
+            <a:off x="594360" y="2532888"/>
             <a:ext cx="438912" cy="438912"/>
           </a:xfrm>
           <a:prstGeom prst="roundRect">
@@ -3877,7 +3877,7 @@
         </p:nvSpPr>
         <p:spPr>
           <a:xfrm>
-            <a:off x="594360" y="2272284"/>
+            <a:off x="594360" y="2532888"/>
             <a:ext cx="438912" cy="438912"/>
           </a:xfrm>
           <a:prstGeom prst="rect">
@@ -3910,8 +3910,8 @@
         </p:nvSpPr>
         <p:spPr>
           <a:xfrm>
-            <a:off x="1188720" y="2194560"/>
-            <a:ext cx="10271455" cy="612647"/>
+            <a:off x="1188720" y="2368296"/>
+            <a:ext cx="10271455" cy="786384"/>
           </a:xfrm>
           <a:prstGeom prst="rect">
             <a:avLst/>
@@ -3942,8 +3942,8 @@
         </p:nvSpPr>
         <p:spPr>
           <a:xfrm>
-            <a:off x="457200" y="2971800"/>
-            <a:ext cx="11277295" cy="777240"/>
+            <a:off x="457200" y="3319272"/>
+            <a:ext cx="11277295" cy="950976"/>
           </a:xfrm>
           <a:prstGeom prst="roundRect">
             <a:avLst>
@@ -3987,7 +3987,7 @@
         </p:nvSpPr>
         <p:spPr>
           <a:xfrm>
-            <a:off x="594360" y="3140964"/>
+            <a:off x="594360" y="3575304"/>
             <a:ext cx="438912" cy="438912"/>
           </a:xfrm>
           <a:prstGeom prst="roundRect">
@@ -4032,7 +4032,7 @@
         </p:nvSpPr>
         <p:spPr>
           <a:xfrm>
-            <a:off x="594360" y="3140964"/>
+            <a:off x="594360" y="3575304"/>
             <a:ext cx="438912" cy="438912"/>
           </a:xfrm>
           <a:prstGeom prst="rect">
@@ -4065,8 +4065,8 @@
         </p:nvSpPr>
         <p:spPr>
           <a:xfrm>
-            <a:off x="1188720" y="3063240"/>
-            <a:ext cx="10271455" cy="612647"/>
+            <a:off x="1188720" y="3410712"/>
+            <a:ext cx="10271455" cy="786384"/>
           </a:xfrm>
           <a:prstGeom prst="rect">
             <a:avLst/>
@@ -4097,8 +4097,8 @@
         </p:nvSpPr>
         <p:spPr>
           <a:xfrm>
-            <a:off x="457200" y="3840479"/>
-            <a:ext cx="11277295" cy="777240"/>
+            <a:off x="457200" y="4361688"/>
+            <a:ext cx="11277295" cy="950976"/>
           </a:xfrm>
           <a:prstGeom prst="roundRect">
             <a:avLst>
@@ -4142,7 +4142,7 @@
         </p:nvSpPr>
         <p:spPr>
           <a:xfrm>
-            <a:off x="594360" y="4009643"/>
+            <a:off x="594360" y="4617720"/>
             <a:ext cx="438912" cy="438912"/>
           </a:xfrm>
           <a:prstGeom prst="roundRect">
@@ -4187,7 +4187,7 @@
         </p:nvSpPr>
         <p:spPr>
           <a:xfrm>
-            <a:off x="594360" y="4009643"/>
+            <a:off x="594360" y="4617720"/>
             <a:ext cx="438912" cy="438912"/>
           </a:xfrm>
           <a:prstGeom prst="rect">
@@ -4220,8 +4220,8 @@
         </p:nvSpPr>
         <p:spPr>
           <a:xfrm>
-            <a:off x="1188720" y="3931919"/>
-            <a:ext cx="10271455" cy="612647"/>
+            <a:off x="1188720" y="4453128"/>
+            <a:ext cx="10271455" cy="786384"/>
           </a:xfrm>
           <a:prstGeom prst="rect">
             <a:avLst/>
@@ -4252,8 +4252,8 @@
         </p:nvSpPr>
         <p:spPr>
           <a:xfrm>
-            <a:off x="457200" y="4709160"/>
-            <a:ext cx="11277295" cy="777240"/>
+            <a:off x="457200" y="5404104"/>
+            <a:ext cx="11277295" cy="950976"/>
           </a:xfrm>
           <a:prstGeom prst="roundRect">
             <a:avLst>
@@ -4297,7 +4297,7 @@
         </p:nvSpPr>
         <p:spPr>
           <a:xfrm>
-            <a:off x="594360" y="4878324"/>
+            <a:off x="594360" y="5660136"/>
             <a:ext cx="438912" cy="438912"/>
           </a:xfrm>
           <a:prstGeom prst="roundRect">
@@ -4342,7 +4342,7 @@
         </p:nvSpPr>
         <p:spPr>
           <a:xfrm>
-            <a:off x="594360" y="4878324"/>
+            <a:off x="594360" y="5660136"/>
             <a:ext cx="438912" cy="438912"/>
           </a:xfrm>
           <a:prstGeom prst="rect">
@@ -4375,8 +4375,8 @@
         </p:nvSpPr>
         <p:spPr>
           <a:xfrm>
-            <a:off x="1188720" y="4800600"/>
-            <a:ext cx="10271455" cy="612647"/>
+            <a:off x="1188720" y="5495544"/>
+            <a:ext cx="10271455" cy="786384"/>
           </a:xfrm>
           <a:prstGeom prst="rect">
             <a:avLst/>
@@ -8217,8 +8217,8 @@
         </p:blipFill>
         <p:spPr>
           <a:xfrm>
-            <a:off x="1743913" y="1792224"/>
-            <a:ext cx="1051560" cy="1051560"/>
+            <a:off x="1643329" y="1847087"/>
+            <a:ext cx="1252728" cy="1252728"/>
           </a:xfrm>
           <a:prstGeom prst="rect">
             <a:avLst/>
@@ -8233,8 +8233,8 @@
         </p:nvSpPr>
         <p:spPr>
           <a:xfrm>
-            <a:off x="530352" y="2916936"/>
-            <a:ext cx="3478682" cy="502920"/>
+            <a:off x="530352" y="3191256"/>
+            <a:ext cx="3478682" cy="621792"/>
           </a:xfrm>
           <a:prstGeom prst="rect">
             <a:avLst/>
@@ -8421,8 +8421,8 @@
         </p:blipFill>
         <p:spPr>
           <a:xfrm>
-            <a:off x="5570067" y="1792224"/>
-            <a:ext cx="1051560" cy="1051560"/>
+            <a:off x="5469483" y="1847087"/>
+            <a:ext cx="1252728" cy="1252728"/>
           </a:xfrm>
           <a:prstGeom prst="rect">
             <a:avLst/>
@@ -8437,8 +8437,8 @@
         </p:nvSpPr>
         <p:spPr>
           <a:xfrm>
-            <a:off x="4356506" y="2916936"/>
-            <a:ext cx="3478682" cy="502920"/>
+            <a:off x="4356506" y="3191256"/>
+            <a:ext cx="3478682" cy="621792"/>
           </a:xfrm>
           <a:prstGeom prst="rect">
             <a:avLst/>
@@ -8625,8 +8625,8 @@
         </p:blipFill>
         <p:spPr>
           <a:xfrm>
-            <a:off x="9396222" y="1792224"/>
-            <a:ext cx="1051560" cy="1051560"/>
+            <a:off x="9295638" y="1847087"/>
+            <a:ext cx="1252728" cy="1252728"/>
           </a:xfrm>
           <a:prstGeom prst="rect">
             <a:avLst/>
@@ -8641,8 +8641,8 @@
         </p:nvSpPr>
         <p:spPr>
           <a:xfrm>
-            <a:off x="8182660" y="2916936"/>
-            <a:ext cx="3478682" cy="502920"/>
+            <a:off x="8182660" y="3191256"/>
+            <a:ext cx="3478682" cy="621792"/>
           </a:xfrm>
           <a:prstGeom prst="rect">
             <a:avLst/>

--- a/Bases de Datos II/Clases/Clase 15 - Presentacion del proyecto y cierre/Presentacion.pptx
+++ b/Bases de Datos II/Clases/Clase 15 - Presentacion del proyecto y cierre/Presentacion.pptx
@@ -5284,7 +5284,7 @@
               </a:spcAft>
             </a:pPr>
             <a:r>
-              <a:rPr sz="1600" b="0" i="0">
+              <a:rPr sz="2000" b="0" i="0">
                 <a:solidFill>
                   <a:srgbClr val="333333"/>
                 </a:solidFill>
@@ -5293,7 +5293,7 @@
               <a:t>–   </a:t>
             </a:r>
             <a:r>
-              <a:rPr sz="1600" b="1" i="0">
+              <a:rPr sz="2000" b="1" i="0">
                 <a:solidFill>
                   <a:srgbClr val="333333"/>
                 </a:solidFill>
@@ -5302,7 +5302,7 @@
               <a:t>Entregable:</a:t>
             </a:r>
             <a:r>
-              <a:rPr sz="1600" b="0" i="0">
+              <a:rPr sz="2000" b="0" i="0">
                 <a:solidFill>
                   <a:srgbClr val="333333"/>
                 </a:solidFill>
@@ -5318,7 +5318,7 @@
               </a:spcAft>
             </a:pPr>
             <a:r>
-              <a:rPr sz="1600" b="0" i="0">
+              <a:rPr sz="2000" b="0" i="0">
                 <a:solidFill>
                   <a:srgbClr val="333333"/>
                 </a:solidFill>
@@ -5334,7 +5334,7 @@
               </a:spcAft>
             </a:pPr>
             <a:r>
-              <a:rPr sz="1600" b="0" i="0">
+              <a:rPr sz="2000" b="0" i="0">
                 <a:solidFill>
                   <a:srgbClr val="333333"/>
                 </a:solidFill>
@@ -5343,7 +5343,7 @@
               <a:t>–   Puedes explicar </a:t>
             </a:r>
             <a:r>
-              <a:rPr sz="1600" b="1" i="0">
+              <a:rPr sz="2000" b="1" i="0">
                 <a:solidFill>
                   <a:srgbClr val="333333"/>
                 </a:solidFill>
@@ -5352,7 +5352,7 @@
               <a:t>cualquier</a:t>
             </a:r>
             <a:r>
-              <a:rPr sz="1600" b="0" i="0">
+              <a:rPr sz="2000" b="0" i="0">
                 <a:solidFill>
                   <a:srgbClr val="333333"/>
                 </a:solidFill>
@@ -5368,7 +5368,7 @@
               </a:spcAft>
             </a:pPr>
             <a:r>
-              <a:rPr sz="1600" b="0" i="0">
+              <a:rPr sz="2000" b="0" i="0">
                 <a:solidFill>
                   <a:srgbClr val="333333"/>
                 </a:solidFill>
@@ -5377,7 +5377,7 @@
               <a:t>–   </a:t>
             </a:r>
             <a:r>
-              <a:rPr sz="1600" b="1" i="0">
+              <a:rPr sz="2000" b="1" i="0">
                 <a:solidFill>
                   <a:srgbClr val="333333"/>
                 </a:solidFill>
@@ -5386,7 +5386,7 @@
               <a:t>Entrega en ExamLab</a:t>
             </a:r>
             <a:r>
-              <a:rPr sz="1600" b="0" i="0">
+              <a:rPr sz="2000" b="0" i="0">
                 <a:solidFill>
                   <a:srgbClr val="333333"/>
                 </a:solidFill>
@@ -5395,7 +5395,7 @@
               <a:t> (https://uniaj.examlab.workers.dev/ · módulo Proyectos) — </a:t>
             </a:r>
             <a:r>
-              <a:rPr sz="1600" b="1" i="0">
+              <a:rPr sz="2000" b="1" i="0">
                 <a:solidFill>
                   <a:srgbClr val="333333"/>
                 </a:solidFill>
@@ -5404,7 +5404,7 @@
               <a:t>antes</a:t>
             </a:r>
             <a:r>
-              <a:rPr sz="1600" b="0" i="0">
+              <a:rPr sz="2000" b="0" i="0">
                 <a:solidFill>
                   <a:srgbClr val="333333"/>
                 </a:solidFill>
@@ -6451,7 +6451,7 @@
               </a:spcAft>
             </a:pPr>
             <a:r>
-              <a:rPr sz="1600" b="0" i="0">
+              <a:rPr sz="2000" b="0" i="0">
                 <a:solidFill>
                   <a:srgbClr val="333333"/>
                 </a:solidFill>
@@ -6460,7 +6460,7 @@
               <a:t>–   </a:t>
             </a:r>
             <a:r>
-              <a:rPr sz="1600" b="1" i="0">
+              <a:rPr sz="2000" b="1" i="0">
                 <a:solidFill>
                   <a:srgbClr val="333333"/>
                 </a:solidFill>
@@ -6469,7 +6469,7 @@
               <a:t>Hoy cerramos el PI:</a:t>
             </a:r>
             <a:r>
-              <a:rPr sz="1600" b="0" i="0">
+              <a:rPr sz="2000" b="0" i="0">
                 <a:solidFill>
                   <a:srgbClr val="333333"/>
                 </a:solidFill>
@@ -6485,7 +6485,7 @@
               </a:spcAft>
             </a:pPr>
             <a:r>
-              <a:rPr sz="1600" b="0" i="0">
+              <a:rPr sz="2000" b="0" i="0">
                 <a:solidFill>
                   <a:srgbClr val="333333"/>
                 </a:solidFill>
@@ -6494,7 +6494,7 @@
               <a:t>–   Sesión </a:t>
             </a:r>
             <a:r>
-              <a:rPr sz="1600" b="1" i="0">
+              <a:rPr sz="2000" b="1" i="0">
                 <a:solidFill>
                   <a:srgbClr val="333333"/>
                 </a:solidFill>
@@ -6503,7 +6503,7 @@
               <a:t>síncrona</a:t>
             </a:r>
             <a:r>
-              <a:rPr sz="1600" b="0" i="0">
+              <a:rPr sz="2000" b="0" i="0">
                 <a:solidFill>
                   <a:srgbClr val="333333"/>
                 </a:solidFill>
@@ -6512,7 +6512,7 @@
               <a:t> de sustentaciones · Bloque </a:t>
             </a:r>
             <a:r>
-              <a:rPr sz="1600" b="1" i="0">
+              <a:rPr sz="2000" b="1" i="0">
                 <a:solidFill>
                   <a:srgbClr val="333333"/>
                 </a:solidFill>
@@ -6521,7 +6521,7 @@
               <a:t>120 min</a:t>
             </a:r>
             <a:r>
-              <a:rPr sz="1600" b="0" i="0">
+              <a:rPr sz="2000" b="0" i="0">
                 <a:solidFill>
                   <a:srgbClr val="333333"/>
                 </a:solidFill>
@@ -6537,7 +6537,7 @@
               </a:spcAft>
             </a:pPr>
             <a:r>
-              <a:rPr sz="1600" b="0" i="0">
+              <a:rPr sz="2000" b="0" i="0">
                 <a:solidFill>
                   <a:srgbClr val="333333"/>
                 </a:solidFill>
@@ -6546,7 +6546,7 @@
               <a:t>–   </a:t>
             </a:r>
             <a:r>
-              <a:rPr sz="1600" b="1" i="0">
+              <a:rPr sz="2000" b="1" i="0">
                 <a:solidFill>
                   <a:srgbClr val="333333"/>
                 </a:solidFill>
@@ -6555,7 +6555,7 @@
               <a:t>Entregable de hoy:</a:t>
             </a:r>
             <a:r>
-              <a:rPr sz="1600" b="0" i="0">
+              <a:rPr sz="2000" b="0" i="0">
                 <a:solidFill>
                   <a:srgbClr val="333333"/>
                 </a:solidFill>
@@ -6571,7 +6571,7 @@
               </a:spcAft>
             </a:pPr>
             <a:r>
-              <a:rPr sz="1600" b="0" i="0">
+              <a:rPr sz="2000" b="0" i="0">
                 <a:solidFill>
                   <a:srgbClr val="333333"/>
                 </a:solidFill>
@@ -6580,7 +6580,7 @@
               <a:t>–   Sube el paquete a ExamLab </a:t>
             </a:r>
             <a:r>
-              <a:rPr sz="1600" b="1" i="0">
+              <a:rPr sz="2000" b="1" i="0">
                 <a:solidFill>
                   <a:srgbClr val="333333"/>
                 </a:solidFill>
@@ -6589,7 +6589,7 @@
               <a:t>antes</a:t>
             </a:r>
             <a:r>
-              <a:rPr sz="1600" b="0" i="0">
+              <a:rPr sz="2000" b="0" i="0">
                 <a:solidFill>
                   <a:srgbClr val="333333"/>
                 </a:solidFill>
@@ -6605,7 +6605,7 @@
               </a:spcAft>
             </a:pPr>
             <a:r>
-              <a:rPr sz="1600" b="0" i="0">
+              <a:rPr sz="2000" b="0" i="0">
                 <a:solidFill>
                   <a:srgbClr val="333333"/>
                 </a:solidFill>
@@ -6614,7 +6614,7 @@
               <a:t>–   La sustentación es </a:t>
             </a:r>
             <a:r>
-              <a:rPr sz="1600" b="1" i="0">
+              <a:rPr sz="2000" b="1" i="0">
                 <a:solidFill>
                   <a:srgbClr val="333333"/>
                 </a:solidFill>
@@ -6623,7 +6623,7 @@
               <a:t>en vivo</a:t>
             </a:r>
             <a:r>
-              <a:rPr sz="1600" b="0" i="0">
+              <a:rPr sz="2000" b="0" i="0">
                 <a:solidFill>
                   <a:srgbClr val="333333"/>
                 </a:solidFill>
@@ -6947,7 +6947,7 @@
         <p:spPr>
           <a:xfrm>
             <a:off x="502920" y="2587752"/>
-            <a:ext cx="3667658" cy="2560320"/>
+            <a:ext cx="3667658" cy="3310128"/>
           </a:xfrm>
           <a:prstGeom prst="rect">
             <a:avLst/>
@@ -7062,7 +7062,7 @@
         <p:spPr>
           <a:xfrm>
             <a:off x="4262018" y="2587752"/>
-            <a:ext cx="3667658" cy="2560320"/>
+            <a:ext cx="3667658" cy="3310128"/>
           </a:xfrm>
           <a:prstGeom prst="rect">
             <a:avLst/>
@@ -7177,7 +7177,7 @@
         <p:spPr>
           <a:xfrm>
             <a:off x="8021116" y="2587752"/>
-            <a:ext cx="3667658" cy="2560320"/>
+            <a:ext cx="3667658" cy="3310128"/>
           </a:xfrm>
           <a:prstGeom prst="rect">
             <a:avLst/>
@@ -7211,8 +7211,8 @@
         </p:nvSpPr>
         <p:spPr>
           <a:xfrm>
-            <a:off x="457200" y="5943600"/>
-            <a:ext cx="11277295" cy="365760"/>
+            <a:off x="457200" y="5806440"/>
+            <a:ext cx="11277295" cy="640080"/>
           </a:xfrm>
           <a:prstGeom prst="rect">
             <a:avLst/>
@@ -7465,7 +7465,7 @@
               </a:spcAft>
             </a:pPr>
             <a:r>
-              <a:rPr sz="1500" b="0" i="0">
+              <a:rPr sz="2000" b="0" i="0">
                 <a:solidFill>
                   <a:srgbClr val="333333"/>
                 </a:solidFill>
@@ -7481,7 +7481,7 @@
               </a:spcAft>
             </a:pPr>
             <a:r>
-              <a:rPr sz="1500" b="0" i="0">
+              <a:rPr sz="2000" b="0" i="0">
                 <a:solidFill>
                   <a:srgbClr val="333333"/>
                 </a:solidFill>
@@ -7497,7 +7497,7 @@
               </a:spcAft>
             </a:pPr>
             <a:r>
-              <a:rPr sz="1500" b="0" i="0">
+              <a:rPr sz="2000" b="0" i="0">
                 <a:solidFill>
                   <a:srgbClr val="333333"/>
                 </a:solidFill>
@@ -7717,7 +7717,7 @@
               </a:spcAft>
             </a:pPr>
             <a:r>
-              <a:rPr sz="1600" b="0" i="0">
+              <a:rPr sz="2000" b="0" i="0">
                 <a:solidFill>
                   <a:srgbClr val="333333"/>
                 </a:solidFill>
@@ -7726,7 +7726,7 @@
               <a:t>–   Sustentación </a:t>
             </a:r>
             <a:r>
-              <a:rPr sz="1600" b="1" i="0">
+              <a:rPr sz="2000" b="1" i="0">
                 <a:solidFill>
                   <a:srgbClr val="333333"/>
                 </a:solidFill>
@@ -7735,7 +7735,7 @@
               <a:t>en vivo</a:t>
             </a:r>
             <a:r>
-              <a:rPr sz="1600" b="0" i="0">
+              <a:rPr sz="2000" b="0" i="0">
                 <a:solidFill>
                   <a:srgbClr val="333333"/>
                 </a:solidFill>
@@ -7751,7 +7751,7 @@
               </a:spcAft>
             </a:pPr>
             <a:r>
-              <a:rPr sz="1600" b="0" i="0">
+              <a:rPr sz="2000" b="0" i="0">
                 <a:solidFill>
                   <a:srgbClr val="333333"/>
                 </a:solidFill>
@@ -7760,7 +7760,7 @@
               <a:t>–   Turnos de </a:t>
             </a:r>
             <a:r>
-              <a:rPr sz="1600" b="1" i="0">
+              <a:rPr sz="2000" b="1" i="0">
                 <a:solidFill>
                   <a:srgbClr val="333333"/>
                 </a:solidFill>
@@ -7769,7 +7769,7 @@
               <a:t>5–8 min de pitch + Q&amp;A</a:t>
             </a:r>
             <a:r>
-              <a:rPr sz="1600" b="0" i="0">
+              <a:rPr sz="2000" b="0" i="0">
                 <a:solidFill>
                   <a:srgbClr val="333333"/>
                 </a:solidFill>
@@ -7785,7 +7785,7 @@
               </a:spcAft>
             </a:pPr>
             <a:r>
-              <a:rPr sz="1600" b="0" i="0">
+              <a:rPr sz="2000" b="0" i="0">
                 <a:solidFill>
                   <a:srgbClr val="333333"/>
                 </a:solidFill>
@@ -7794,7 +7794,7 @@
               <a:t>–   Ten listo: </a:t>
             </a:r>
             <a:r>
-              <a:rPr sz="1600" b="1" i="0">
+              <a:rPr sz="2000" b="1" i="0">
                 <a:solidFill>
                   <a:srgbClr val="333333"/>
                 </a:solidFill>
@@ -7810,7 +7810,7 @@
               </a:spcAft>
             </a:pPr>
             <a:r>
-              <a:rPr sz="1600" b="0" i="0">
+              <a:rPr sz="2000" b="0" i="0">
                 <a:solidFill>
                   <a:srgbClr val="333333"/>
                 </a:solidFill>
@@ -7819,7 +7819,7 @@
               <a:t>–   En tu turno muestra una </a:t>
             </a:r>
             <a:r>
-              <a:rPr sz="1600" b="1" i="0">
+              <a:rPr sz="2000" b="1" i="0">
                 <a:solidFill>
                   <a:srgbClr val="333333"/>
                 </a:solidFill>
@@ -7828,7 +7828,7 @@
               <a:t>ejecución real</a:t>
             </a:r>
             <a:r>
-              <a:rPr sz="1600" b="0" i="0">
+              <a:rPr sz="2000" b="0" i="0">
                 <a:solidFill>
                   <a:srgbClr val="333333"/>
                 </a:solidFill>
@@ -7844,7 +7844,7 @@
               </a:spcAft>
             </a:pPr>
             <a:r>
-              <a:rPr sz="1600" b="0" i="0">
+              <a:rPr sz="2000" b="0" i="0">
                 <a:solidFill>
                   <a:srgbClr val="333333"/>
                 </a:solidFill>
@@ -8891,7 +8891,7 @@
               </a:spcAft>
             </a:pPr>
             <a:r>
-              <a:rPr sz="1600" b="0" i="0">
+              <a:rPr sz="2000" b="0" i="0">
                 <a:solidFill>
                   <a:srgbClr val="333333"/>
                 </a:solidFill>
@@ -8900,7 +8900,7 @@
               <a:t>–   </a:t>
             </a:r>
             <a:r>
-              <a:rPr sz="1600" b="1" i="0">
+              <a:rPr sz="2000" b="1" i="0">
                 <a:solidFill>
                   <a:srgbClr val="333333"/>
                 </a:solidFill>
@@ -8909,7 +8909,7 @@
               <a:t>Por qué importa al PI:</a:t>
             </a:r>
             <a:r>
-              <a:rPr sz="1600" b="0" i="0">
+              <a:rPr sz="2000" b="0" i="0">
                 <a:solidFill>
                   <a:srgbClr val="333333"/>
                 </a:solidFill>
@@ -8925,7 +8925,7 @@
               </a:spcAft>
             </a:pPr>
             <a:r>
-              <a:rPr sz="1600" b="0" i="0">
+              <a:rPr sz="2000" b="0" i="0">
                 <a:solidFill>
                   <a:srgbClr val="333333"/>
                 </a:solidFill>
@@ -9145,7 +9145,7 @@
               </a:spcAft>
             </a:pPr>
             <a:r>
-              <a:rPr sz="1500" b="0" i="0">
+              <a:rPr sz="2000" b="0" i="0">
                 <a:solidFill>
                   <a:srgbClr val="333333"/>
                 </a:solidFill>
@@ -9154,7 +9154,7 @@
               <a:t>–   </a:t>
             </a:r>
             <a:r>
-              <a:rPr sz="1500" b="1" i="0">
+              <a:rPr sz="2000" b="1" i="0">
                 <a:solidFill>
                   <a:srgbClr val="333333"/>
                 </a:solidFill>
@@ -9163,7 +9163,7 @@
               <a:t>Objetivo:</a:t>
             </a:r>
             <a:r>
-              <a:rPr sz="1500" b="0" i="0">
+              <a:rPr sz="2000" b="0" i="0">
                 <a:solidFill>
                   <a:srgbClr val="333333"/>
                 </a:solidFill>
@@ -9179,7 +9179,7 @@
               </a:spcAft>
             </a:pPr>
             <a:r>
-              <a:rPr sz="1500" b="0" i="0">
+              <a:rPr sz="2000" b="0" i="0">
                 <a:solidFill>
                   <a:srgbClr val="333333"/>
                 </a:solidFill>
@@ -9188,7 +9188,7 @@
               <a:t>–   </a:t>
             </a:r>
             <a:r>
-              <a:rPr sz="1500" b="1" i="0">
+              <a:rPr sz="2000" b="1" i="0">
                 <a:solidFill>
                   <a:srgbClr val="333333"/>
                 </a:solidFill>
@@ -9197,7 +9197,7 @@
               <a:t>Exito:</a:t>
             </a:r>
             <a:r>
-              <a:rPr sz="1500" b="0" i="0">
+              <a:rPr sz="2000" b="0" i="0">
                 <a:solidFill>
                   <a:srgbClr val="333333"/>
                 </a:solidFill>
@@ -9213,7 +9213,7 @@
               </a:spcAft>
             </a:pPr>
             <a:r>
-              <a:rPr sz="1500" b="0" i="0">
+              <a:rPr sz="2000" b="0" i="0">
                 <a:solidFill>
                   <a:srgbClr val="333333"/>
                 </a:solidFill>
@@ -9222,7 +9222,7 @@
               <a:t>–   </a:t>
             </a:r>
             <a:r>
-              <a:rPr sz="1500" b="1" i="0">
+              <a:rPr sz="2000" b="1" i="0">
                 <a:solidFill>
                   <a:srgbClr val="333333"/>
                 </a:solidFill>
@@ -9231,7 +9231,7 @@
               <a:t>Exito:</a:t>
             </a:r>
             <a:r>
-              <a:rPr sz="1500" b="0" i="0">
+              <a:rPr sz="2000" b="0" i="0">
                 <a:solidFill>
                   <a:srgbClr val="333333"/>
                 </a:solidFill>
@@ -9247,7 +9247,7 @@
               </a:spcAft>
             </a:pPr>
             <a:r>
-              <a:rPr sz="1500" b="0" i="0">
+              <a:rPr sz="2000" b="0" i="0">
                 <a:solidFill>
                   <a:srgbClr val="333333"/>
                 </a:solidFill>
@@ -9256,7 +9256,7 @@
               <a:t>–   </a:t>
             </a:r>
             <a:r>
-              <a:rPr sz="1500" b="1" i="0">
+              <a:rPr sz="2000" b="1" i="0">
                 <a:solidFill>
                   <a:srgbClr val="333333"/>
                 </a:solidFill>
@@ -9265,7 +9265,7 @@
               <a:t>Exito:</a:t>
             </a:r>
             <a:r>
-              <a:rPr sz="1500" b="0" i="0">
+              <a:rPr sz="2000" b="0" i="0">
                 <a:solidFill>
                   <a:srgbClr val="333333"/>
                 </a:solidFill>
@@ -9281,7 +9281,7 @@
               </a:spcAft>
             </a:pPr>
             <a:r>
-              <a:rPr sz="1500" b="0" i="0">
+              <a:rPr sz="2000" b="0" i="0">
                 <a:solidFill>
                   <a:srgbClr val="333333"/>
                 </a:solidFill>
@@ -9290,7 +9290,7 @@
               <a:t>–   </a:t>
             </a:r>
             <a:r>
-              <a:rPr sz="1500" b="1" i="0">
+              <a:rPr sz="2000" b="1" i="0">
                 <a:solidFill>
                   <a:srgbClr val="333333"/>
                 </a:solidFill>
@@ -9299,7 +9299,7 @@
               <a:t>Exito:</a:t>
             </a:r>
             <a:r>
-              <a:rPr sz="1500" b="0" i="0">
+              <a:rPr sz="2000" b="0" i="0">
                 <a:solidFill>
                   <a:srgbClr val="333333"/>
                 </a:solidFill>
@@ -9315,7 +9315,7 @@
               </a:spcAft>
             </a:pPr>
             <a:r>
-              <a:rPr sz="1500" b="0" i="0">
+              <a:rPr sz="2000" b="0" i="0">
                 <a:solidFill>
                   <a:srgbClr val="333333"/>
                 </a:solidFill>
@@ -9324,7 +9324,7 @@
               <a:t>–   </a:t>
             </a:r>
             <a:r>
-              <a:rPr sz="1500" b="1" i="0">
+              <a:rPr sz="2000" b="1" i="0">
                 <a:solidFill>
                   <a:srgbClr val="333333"/>
                 </a:solidFill>
@@ -9333,7 +9333,7 @@
               <a:t>Exito:</a:t>
             </a:r>
             <a:r>
-              <a:rPr sz="1500" b="0" i="0">
+              <a:rPr sz="2000" b="0" i="0">
                 <a:solidFill>
                   <a:srgbClr val="333333"/>
                 </a:solidFill>
@@ -9553,7 +9553,7 @@
               </a:spcAft>
             </a:pPr>
             <a:r>
-              <a:rPr sz="1600" b="0" i="0">
+              <a:rPr sz="2000" b="0" i="0">
                 <a:solidFill>
                   <a:srgbClr val="333333"/>
                 </a:solidFill>
@@ -9569,7 +9569,7 @@
               </a:spcAft>
             </a:pPr>
             <a:r>
-              <a:rPr sz="1600" b="0" i="0">
+              <a:rPr sz="2000" b="0" i="0">
                 <a:solidFill>
                   <a:srgbClr val="333333"/>
                 </a:solidFill>

--- a/Bases de Datos II/Clases/Clase 15 - Presentacion del proyecto y cierre/Presentacion.pptx
+++ b/Bases de Datos II/Clases/Clase 15 - Presentacion del proyecto y cierre/Presentacion.pptx
@@ -3774,7 +3774,7 @@
                 </a:solidFill>
                 <a:latin typeface="Calibri"/>
               </a:rPr>
-              <a:t>Subir el paquete final a ExamLab (modulo Proyectos) ANTES de su turno.</a:t>
+              <a:t>Subir el paquete final a la plataforma del curso (modulo Proyectos) ANTES de su turno.</a:t>
             </a:r>
           </a:p>
         </p:txBody>
@@ -5383,7 +5383,7 @@
                 </a:solidFill>
                 <a:latin typeface="Calibri"/>
               </a:rPr>
-              <a:t>Entrega en ExamLab</a:t>
+              <a:t>Entrega en la plataforma del curso</a:t>
             </a:r>
             <a:r>
               <a:rPr sz="2000" b="0" i="0">
@@ -5392,7 +5392,7 @@
                 </a:solidFill>
                 <a:latin typeface="Calibri"/>
               </a:rPr>
-              <a:t> (https://uniaj.examlab.workers.dev/ · módulo Proyectos) — </a:t>
+              <a:t> — </a:t>
             </a:r>
             <a:r>
               <a:rPr sz="2000" b="1" i="0">
@@ -6577,7 +6577,7 @@
                 </a:solidFill>
                 <a:latin typeface="Calibri"/>
               </a:rPr>
-              <a:t>–   Sube el paquete a ExamLab </a:t>
+              <a:t>–   Sube el paquete a la plataforma del curso </a:t>
             </a:r>
             <a:r>
               <a:rPr sz="2000" b="1" i="0">
@@ -9203,7 +9203,7 @@
                 </a:solidFill>
                 <a:latin typeface="Calibri"/>
               </a:rPr>
-              <a:t> ZIP/PDF en ExamLab ANTES del turno.</a:t>
+              <a:t> ZIP/PDF en la plataforma del curso ANTES del turno.</a:t>
             </a:r>
           </a:p>
           <a:p>
